--- a/ayni-pitch/Ayni-tech-deck.pptx
+++ b/ayni-pitch/Ayni-tech-deck.pptx
@@ -3180,7 +3180,7 @@
                 </a:solidFill>
                 <a:latin typeface="Consolas"/>
               </a:rPr>
-              <a:t>0:00 – 0:10</a:t>
+              <a:t>0:00 – 0:08</a:t>
             </a:r>
           </a:p>
         </p:txBody>
@@ -3446,7 +3446,7 @@
                 </a:solidFill>
                 <a:latin typeface="Consolas"/>
               </a:rPr>
-              <a:t>0:10 – 0:18</a:t>
+              <a:t>0:08 – 0:25</a:t>
             </a:r>
           </a:p>
         </p:txBody>
@@ -3503,7 +3503,7 @@
         <p:spPr>
           <a:xfrm>
             <a:off x="777240" y="640080"/>
-            <a:ext cx="4572000" cy="457200"/>
+            <a:ext cx="5486400" cy="457200"/>
           </a:xfrm>
           <a:prstGeom prst="rect">
             <a:avLst/>
@@ -3528,7 +3528,7 @@
                 </a:solidFill>
                 <a:latin typeface="Calibri"/>
               </a:rPr>
-              <a:t>STACK</a:t>
+              <a:t>SYSTEM ARCHITECTURE</a:t>
             </a:r>
           </a:p>
         </p:txBody>
@@ -3541,8 +3541,8 @@
         </p:nvSpPr>
         <p:spPr>
           <a:xfrm>
-            <a:off x="548640" y="1371600"/>
-            <a:ext cx="11091672" cy="914400"/>
+            <a:off x="548640" y="1234440"/>
+            <a:ext cx="11091672" cy="822960"/>
           </a:xfrm>
           <a:prstGeom prst="rect">
             <a:avLst/>
@@ -3561,13 +3561,13 @@
               </a:lnSpc>
             </a:pPr>
             <a:r>
-              <a:rPr sz="4400" b="1" i="0">
+              <a:rPr sz="3400" b="1" i="0">
                 <a:solidFill>
                   <a:srgbClr val="ECECF0"/>
                 </a:solidFill>
                 <a:latin typeface="Calibri"/>
               </a:rPr>
-              <a:t>What we built it on.</a:t>
+              <a:t>How it fits together.</a:t>
             </a:r>
           </a:p>
         </p:txBody>
@@ -3580,8 +3580,8 @@
         </p:nvSpPr>
         <p:spPr>
           <a:xfrm>
-            <a:off x="548640" y="2834640"/>
-            <a:ext cx="5362956" cy="1463040"/>
+            <a:off x="548640" y="3200400"/>
+            <a:ext cx="2103120" cy="2194560"/>
           </a:xfrm>
           <a:prstGeom prst="roundRect">
             <a:avLst>
@@ -3625,8 +3625,8 @@
         </p:nvSpPr>
         <p:spPr>
           <a:xfrm>
-            <a:off x="914400" y="3063240"/>
-            <a:ext cx="4631436" cy="640080"/>
+            <a:off x="548640" y="3520440"/>
+            <a:ext cx="2103120" cy="548640"/>
           </a:xfrm>
           <a:prstGeom prst="rect">
             <a:avLst/>
@@ -3639,19 +3639,19 @@
           </a:bodyPr>
           <a:lstStyle/>
           <a:p>
-            <a:pPr algn="l">
+            <a:pPr algn="ctr">
               <a:lnSpc>
                 <a:spcPct val="100000"/>
               </a:lnSpc>
             </a:pPr>
             <a:r>
-              <a:rPr sz="3000" b="1" i="0">
+              <a:rPr sz="2200" b="1" i="0">
                 <a:solidFill>
                   <a:srgbClr val="F7931A"/>
                 </a:solidFill>
                 <a:latin typeface="Calibri"/>
               </a:rPr>
-              <a:t>Next.js 15</a:t>
+              <a:t>AI Agent</a:t>
             </a:r>
           </a:p>
         </p:txBody>
@@ -3664,8 +3664,8 @@
         </p:nvSpPr>
         <p:spPr>
           <a:xfrm>
-            <a:off x="914400" y="3703320"/>
-            <a:ext cx="4631436" cy="457200"/>
+            <a:off x="548640" y="4114800"/>
+            <a:ext cx="2103120" cy="457200"/>
           </a:xfrm>
           <a:prstGeom prst="rect">
             <a:avLst/>
@@ -3678,33 +3678,886 @@
           </a:bodyPr>
           <a:lstStyle/>
           <a:p>
+            <a:pPr algn="ctr">
+              <a:lnSpc>
+                <a:spcPct val="100000"/>
+              </a:lnSpc>
+            </a:pPr>
+            <a:r>
+              <a:rPr sz="1600" b="0" i="0">
+                <a:solidFill>
+                  <a:srgbClr val="ECECF0"/>
+                </a:solidFill>
+                <a:latin typeface="Calibri"/>
+              </a:rPr>
+              <a:t>+ wallet</a:t>
+            </a:r>
+          </a:p>
+        </p:txBody>
+      </p:sp>
+      <p:sp>
+        <p:nvSpPr>
+          <p:cNvPr id="10" name="TextBox 9"/>
+          <p:cNvSpPr txBox="1"/>
+          <p:nvPr/>
+        </p:nvSpPr>
+        <p:spPr>
+          <a:xfrm>
+            <a:off x="548640" y="4617720"/>
+            <a:ext cx="2103120" cy="640080"/>
+          </a:xfrm>
+          <a:prstGeom prst="rect">
+            <a:avLst/>
+          </a:prstGeom>
+          <a:noFill/>
+        </p:spPr>
+        <p:txBody>
+          <a:bodyPr wrap="square" lIns="0" rIns="0" tIns="0" bIns="0">
+            <a:spAutoFit/>
+          </a:bodyPr>
+          <a:lstStyle/>
+          <a:p>
+            <a:pPr algn="ctr">
+              <a:lnSpc>
+                <a:spcPct val="130000"/>
+              </a:lnSpc>
+            </a:pPr>
+            <a:r>
+              <a:rPr sz="1000" b="0" i="0">
+                <a:solidFill>
+                  <a:srgbClr val="8B93A7"/>
+                </a:solidFill>
+                <a:latin typeface="Consolas"/>
+              </a:rPr>
+              <a:t>MDK · Phoenix</a:t>
+            </a:r>
+          </a:p>
+          <a:p>
+            <a:pPr algn="ctr">
+              <a:lnSpc>
+                <a:spcPct val="130000"/>
+              </a:lnSpc>
+            </a:pPr>
+            <a:r>
+              <a:rPr sz="1000" b="0" i="0">
+                <a:solidFill>
+                  <a:srgbClr val="8B93A7"/>
+                </a:solidFill>
+                <a:latin typeface="Consolas"/>
+              </a:rPr>
+              <a:t>Alby · Strike</a:t>
+            </a:r>
+          </a:p>
+        </p:txBody>
+      </p:sp>
+      <p:sp>
+        <p:nvSpPr>
+          <p:cNvPr id="11" name="Rounded Rectangle 10"/>
+          <p:cNvSpPr/>
+          <p:nvPr/>
+        </p:nvSpPr>
+        <p:spPr>
+          <a:xfrm>
+            <a:off x="3200400" y="2331720"/>
+            <a:ext cx="5394960" cy="3931920"/>
+          </a:xfrm>
+          <a:prstGeom prst="roundRect">
+            <a:avLst>
+              <a:gd name="adj" fmla="val 4000"/>
+            </a:avLst>
+          </a:prstGeom>
+          <a:solidFill>
+            <a:srgbClr val="182138"/>
+          </a:solidFill>
+          <a:ln w="12700">
+            <a:solidFill>
+              <a:srgbClr val="F7931A"/>
+            </a:solidFill>
+          </a:ln>
+        </p:spPr>
+        <p:style>
+          <a:lnRef idx="1">
+            <a:schemeClr val="accent1"/>
+          </a:lnRef>
+          <a:fillRef idx="3">
+            <a:schemeClr val="accent1"/>
+          </a:fillRef>
+          <a:effectRef idx="2">
+            <a:schemeClr val="accent1"/>
+          </a:effectRef>
+          <a:fontRef idx="minor">
+            <a:schemeClr val="lt1"/>
+          </a:fontRef>
+        </p:style>
+        <p:txBody>
+          <a:bodyPr rtlCol="0" anchor="ctr"/>
+          <a:lstStyle/>
+          <a:p>
+            <a:pPr algn="ctr"/>
+          </a:p>
+        </p:txBody>
+      </p:sp>
+      <p:sp>
+        <p:nvSpPr>
+          <p:cNvPr id="12" name="TextBox 11"/>
+          <p:cNvSpPr txBox="1"/>
+          <p:nvPr/>
+        </p:nvSpPr>
+        <p:spPr>
+          <a:xfrm>
+            <a:off x="3383280" y="2468880"/>
+            <a:ext cx="5029200" cy="457200"/>
+          </a:xfrm>
+          <a:prstGeom prst="rect">
+            <a:avLst/>
+          </a:prstGeom>
+          <a:noFill/>
+        </p:spPr>
+        <p:txBody>
+          <a:bodyPr wrap="square" lIns="0" rIns="0" tIns="0" bIns="0" anchor="ctr">
+            <a:spAutoFit/>
+          </a:bodyPr>
+          <a:lstStyle/>
+          <a:p>
+            <a:pPr algn="ctr">
+              <a:lnSpc>
+                <a:spcPct val="100000"/>
+              </a:lnSpc>
+            </a:pPr>
+            <a:r>
+              <a:rPr sz="1400" b="1" i="0">
+                <a:solidFill>
+                  <a:srgbClr val="F7931A"/>
+                </a:solidFill>
+                <a:latin typeface="Calibri"/>
+              </a:rPr>
+              <a:t>Ayni  —  Next.js 15 on Vercel</a:t>
+            </a:r>
+          </a:p>
+        </p:txBody>
+      </p:sp>
+      <p:sp>
+        <p:nvSpPr>
+          <p:cNvPr id="13" name="Rounded Rectangle 12"/>
+          <p:cNvSpPr/>
+          <p:nvPr/>
+        </p:nvSpPr>
+        <p:spPr>
+          <a:xfrm>
+            <a:off x="3429000" y="3017520"/>
+            <a:ext cx="2377440" cy="1440179"/>
+          </a:xfrm>
+          <a:prstGeom prst="roundRect">
+            <a:avLst>
+              <a:gd name="adj" fmla="val 6000"/>
+            </a:avLst>
+          </a:prstGeom>
+          <a:solidFill>
+            <a:srgbClr val="222D4A"/>
+          </a:solidFill>
+          <a:ln>
+            <a:noFill/>
+          </a:ln>
+        </p:spPr>
+        <p:style>
+          <a:lnRef idx="1">
+            <a:schemeClr val="accent1"/>
+          </a:lnRef>
+          <a:fillRef idx="3">
+            <a:schemeClr val="accent1"/>
+          </a:fillRef>
+          <a:effectRef idx="2">
+            <a:schemeClr val="accent1"/>
+          </a:effectRef>
+          <a:fontRef idx="minor">
+            <a:schemeClr val="lt1"/>
+          </a:fontRef>
+        </p:style>
+        <p:txBody>
+          <a:bodyPr rtlCol="0" anchor="ctr"/>
+          <a:lstStyle/>
+          <a:p>
+            <a:pPr algn="ctr"/>
+          </a:p>
+        </p:txBody>
+      </p:sp>
+      <p:sp>
+        <p:nvSpPr>
+          <p:cNvPr id="14" name="TextBox 13"/>
+          <p:cNvSpPr txBox="1"/>
+          <p:nvPr/>
+        </p:nvSpPr>
+        <p:spPr>
+          <a:xfrm>
+            <a:off x="3611880" y="3154680"/>
+            <a:ext cx="2011680" cy="365760"/>
+          </a:xfrm>
+          <a:prstGeom prst="rect">
+            <a:avLst/>
+          </a:prstGeom>
+          <a:noFill/>
+        </p:spPr>
+        <p:txBody>
+          <a:bodyPr wrap="square" lIns="0" rIns="0" tIns="0" bIns="0">
+            <a:spAutoFit/>
+          </a:bodyPr>
+          <a:lstStyle/>
+          <a:p>
             <a:pPr algn="l">
               <a:lnSpc>
                 <a:spcPct val="100000"/>
               </a:lnSpc>
             </a:pPr>
             <a:r>
-              <a:rPr sz="1400" b="0" i="0">
-                <a:solidFill>
-                  <a:srgbClr val="8B93A7"/>
+              <a:rPr sz="1500" b="1" i="0">
+                <a:solidFill>
+                  <a:srgbClr val="ECECF0"/>
+                </a:solidFill>
+                <a:latin typeface="Calibri"/>
+              </a:rPr>
+              <a:t>manifest</a:t>
+            </a:r>
+          </a:p>
+        </p:txBody>
+      </p:sp>
+      <p:sp>
+        <p:nvSpPr>
+          <p:cNvPr id="15" name="TextBox 14"/>
+          <p:cNvSpPr txBox="1"/>
+          <p:nvPr/>
+        </p:nvSpPr>
+        <p:spPr>
+          <a:xfrm>
+            <a:off x="3611880" y="3520440"/>
+            <a:ext cx="2011680" cy="274320"/>
+          </a:xfrm>
+          <a:prstGeom prst="rect">
+            <a:avLst/>
+          </a:prstGeom>
+          <a:noFill/>
+        </p:spPr>
+        <p:txBody>
+          <a:bodyPr wrap="square" lIns="0" rIns="0" tIns="0" bIns="0">
+            <a:spAutoFit/>
+          </a:bodyPr>
+          <a:lstStyle/>
+          <a:p>
+            <a:pPr algn="l">
+              <a:lnSpc>
+                <a:spcPct val="100000"/>
+              </a:lnSpc>
+            </a:pPr>
+            <a:r>
+              <a:rPr sz="1000" b="0" i="1">
+                <a:solidFill>
+                  <a:srgbClr val="F7931A"/>
+                </a:solidFill>
+                <a:latin typeface="Calibri"/>
+              </a:rPr>
+              <a:t>discovery</a:t>
+            </a:r>
+          </a:p>
+        </p:txBody>
+      </p:sp>
+      <p:sp>
+        <p:nvSpPr>
+          <p:cNvPr id="16" name="TextBox 15"/>
+          <p:cNvSpPr txBox="1"/>
+          <p:nvPr/>
+        </p:nvSpPr>
+        <p:spPr>
+          <a:xfrm>
+            <a:off x="3611880" y="3794760"/>
+            <a:ext cx="2011680" cy="571499"/>
+          </a:xfrm>
+          <a:prstGeom prst="rect">
+            <a:avLst/>
+          </a:prstGeom>
+          <a:noFill/>
+        </p:spPr>
+        <p:txBody>
+          <a:bodyPr wrap="square" lIns="0" rIns="0" tIns="0" bIns="0">
+            <a:spAutoFit/>
+          </a:bodyPr>
+          <a:lstStyle/>
+          <a:p>
+            <a:pPr algn="l">
+              <a:lnSpc>
+                <a:spcPct val="130000"/>
+              </a:lnSpc>
+            </a:pPr>
+            <a:r>
+              <a:rPr sz="1000" b="0" i="0">
+                <a:solidFill>
+                  <a:srgbClr val="FFD580"/>
                 </a:solidFill>
                 <a:latin typeface="Consolas"/>
               </a:rPr>
-              <a:t>App Router · React 19 · Vercel</a:t>
-            </a:r>
-          </a:p>
-        </p:txBody>
-      </p:sp>
-      <p:sp>
-        <p:nvSpPr>
-          <p:cNvPr id="10" name="Rounded Rectangle 9"/>
+              <a:t>/.well-known/</a:t>
+            </a:r>
+          </a:p>
+          <a:p>
+            <a:pPr algn="l">
+              <a:lnSpc>
+                <a:spcPct val="130000"/>
+              </a:lnSpc>
+            </a:pPr>
+            <a:r>
+              <a:rPr sz="1000" b="0" i="0">
+                <a:solidFill>
+                  <a:srgbClr val="FFD580"/>
+                </a:solidFill>
+                <a:latin typeface="Consolas"/>
+              </a:rPr>
+              <a:t>agent-skill.json</a:t>
+            </a:r>
+          </a:p>
+        </p:txBody>
+      </p:sp>
+      <p:sp>
+        <p:nvSpPr>
+          <p:cNvPr id="17" name="Rounded Rectangle 16"/>
           <p:cNvSpPr/>
           <p:nvPr/>
         </p:nvSpPr>
         <p:spPr>
           <a:xfrm>
-            <a:off x="6277356" y="2834640"/>
-            <a:ext cx="5362956" cy="1463040"/>
+            <a:off x="5989320" y="3017520"/>
+            <a:ext cx="2377440" cy="1440179"/>
+          </a:xfrm>
+          <a:prstGeom prst="roundRect">
+            <a:avLst>
+              <a:gd name="adj" fmla="val 6000"/>
+            </a:avLst>
+          </a:prstGeom>
+          <a:solidFill>
+            <a:srgbClr val="222D4A"/>
+          </a:solidFill>
+          <a:ln>
+            <a:noFill/>
+          </a:ln>
+        </p:spPr>
+        <p:style>
+          <a:lnRef idx="1">
+            <a:schemeClr val="accent1"/>
+          </a:lnRef>
+          <a:fillRef idx="3">
+            <a:schemeClr val="accent1"/>
+          </a:fillRef>
+          <a:effectRef idx="2">
+            <a:schemeClr val="accent1"/>
+          </a:effectRef>
+          <a:fontRef idx="minor">
+            <a:schemeClr val="lt1"/>
+          </a:fontRef>
+        </p:style>
+        <p:txBody>
+          <a:bodyPr rtlCol="0" anchor="ctr"/>
+          <a:lstStyle/>
+          <a:p>
+            <a:pPr algn="ctr"/>
+          </a:p>
+        </p:txBody>
+      </p:sp>
+      <p:sp>
+        <p:nvSpPr>
+          <p:cNvPr id="18" name="TextBox 17"/>
+          <p:cNvSpPr txBox="1"/>
+          <p:nvPr/>
+        </p:nvSpPr>
+        <p:spPr>
+          <a:xfrm>
+            <a:off x="6172200" y="3154680"/>
+            <a:ext cx="2011680" cy="365760"/>
+          </a:xfrm>
+          <a:prstGeom prst="rect">
+            <a:avLst/>
+          </a:prstGeom>
+          <a:noFill/>
+        </p:spPr>
+        <p:txBody>
+          <a:bodyPr wrap="square" lIns="0" rIns="0" tIns="0" bIns="0">
+            <a:spAutoFit/>
+          </a:bodyPr>
+          <a:lstStyle/>
+          <a:p>
+            <a:pPr algn="l">
+              <a:lnSpc>
+                <a:spcPct val="100000"/>
+              </a:lnSpc>
+            </a:pPr>
+            <a:r>
+              <a:rPr sz="1500" b="1" i="0">
+                <a:solidFill>
+                  <a:srgbClr val="ECECF0"/>
+                </a:solidFill>
+                <a:latin typeface="Calibri"/>
+              </a:rPr>
+              <a:t>API route</a:t>
+            </a:r>
+          </a:p>
+        </p:txBody>
+      </p:sp>
+      <p:sp>
+        <p:nvSpPr>
+          <p:cNvPr id="19" name="TextBox 18"/>
+          <p:cNvSpPr txBox="1"/>
+          <p:nvPr/>
+        </p:nvSpPr>
+        <p:spPr>
+          <a:xfrm>
+            <a:off x="6172200" y="3520440"/>
+            <a:ext cx="2011680" cy="274320"/>
+          </a:xfrm>
+          <a:prstGeom prst="rect">
+            <a:avLst/>
+          </a:prstGeom>
+          <a:noFill/>
+        </p:spPr>
+        <p:txBody>
+          <a:bodyPr wrap="square" lIns="0" rIns="0" tIns="0" bIns="0">
+            <a:spAutoFit/>
+          </a:bodyPr>
+          <a:lstStyle/>
+          <a:p>
+            <a:pPr algn="l">
+              <a:lnSpc>
+                <a:spcPct val="100000"/>
+              </a:lnSpc>
+            </a:pPr>
+            <a:r>
+              <a:rPr sz="1000" b="0" i="1">
+                <a:solidFill>
+                  <a:srgbClr val="F7931A"/>
+                </a:solidFill>
+                <a:latin typeface="Calibri"/>
+              </a:rPr>
+              <a:t>L402 paywall</a:t>
+            </a:r>
+          </a:p>
+        </p:txBody>
+      </p:sp>
+      <p:sp>
+        <p:nvSpPr>
+          <p:cNvPr id="20" name="TextBox 19"/>
+          <p:cNvSpPr txBox="1"/>
+          <p:nvPr/>
+        </p:nvSpPr>
+        <p:spPr>
+          <a:xfrm>
+            <a:off x="6172200" y="3794760"/>
+            <a:ext cx="2011680" cy="571499"/>
+          </a:xfrm>
+          <a:prstGeom prst="rect">
+            <a:avLst/>
+          </a:prstGeom>
+          <a:noFill/>
+        </p:spPr>
+        <p:txBody>
+          <a:bodyPr wrap="square" lIns="0" rIns="0" tIns="0" bIns="0">
+            <a:spAutoFit/>
+          </a:bodyPr>
+          <a:lstStyle/>
+          <a:p>
+            <a:pPr algn="l">
+              <a:lnSpc>
+                <a:spcPct val="130000"/>
+              </a:lnSpc>
+            </a:pPr>
+            <a:r>
+              <a:rPr sz="1000" b="0" i="0">
+                <a:solidFill>
+                  <a:srgbClr val="FFD580"/>
+                </a:solidFill>
+                <a:latin typeface="Consolas"/>
+              </a:rPr>
+              <a:t>/api/ayni/[plugin]</a:t>
+            </a:r>
+          </a:p>
+          <a:p>
+            <a:pPr algn="l">
+              <a:lnSpc>
+                <a:spcPct val="130000"/>
+              </a:lnSpc>
+            </a:pPr>
+            <a:r>
+              <a:rPr sz="1000" b="0" i="0">
+                <a:solidFill>
+                  <a:srgbClr val="FFD580"/>
+                </a:solidFill>
+                <a:latin typeface="Consolas"/>
+              </a:rPr>
+              <a:t>MDK · withPayment</a:t>
+            </a:r>
+          </a:p>
+        </p:txBody>
+      </p:sp>
+      <p:sp>
+        <p:nvSpPr>
+          <p:cNvPr id="21" name="Rounded Rectangle 20"/>
+          <p:cNvSpPr/>
+          <p:nvPr/>
+        </p:nvSpPr>
+        <p:spPr>
+          <a:xfrm>
+            <a:off x="3429000" y="4640579"/>
+            <a:ext cx="2377440" cy="1440179"/>
+          </a:xfrm>
+          <a:prstGeom prst="roundRect">
+            <a:avLst>
+              <a:gd name="adj" fmla="val 6000"/>
+            </a:avLst>
+          </a:prstGeom>
+          <a:solidFill>
+            <a:srgbClr val="222D4A"/>
+          </a:solidFill>
+          <a:ln>
+            <a:noFill/>
+          </a:ln>
+        </p:spPr>
+        <p:style>
+          <a:lnRef idx="1">
+            <a:schemeClr val="accent1"/>
+          </a:lnRef>
+          <a:fillRef idx="3">
+            <a:schemeClr val="accent1"/>
+          </a:fillRef>
+          <a:effectRef idx="2">
+            <a:schemeClr val="accent1"/>
+          </a:effectRef>
+          <a:fontRef idx="minor">
+            <a:schemeClr val="lt1"/>
+          </a:fontRef>
+        </p:style>
+        <p:txBody>
+          <a:bodyPr rtlCol="0" anchor="ctr"/>
+          <a:lstStyle/>
+          <a:p>
+            <a:pPr algn="ctr"/>
+          </a:p>
+        </p:txBody>
+      </p:sp>
+      <p:sp>
+        <p:nvSpPr>
+          <p:cNvPr id="22" name="TextBox 21"/>
+          <p:cNvSpPr txBox="1"/>
+          <p:nvPr/>
+        </p:nvSpPr>
+        <p:spPr>
+          <a:xfrm>
+            <a:off x="3611880" y="4777739"/>
+            <a:ext cx="2011680" cy="365760"/>
+          </a:xfrm>
+          <a:prstGeom prst="rect">
+            <a:avLst/>
+          </a:prstGeom>
+          <a:noFill/>
+        </p:spPr>
+        <p:txBody>
+          <a:bodyPr wrap="square" lIns="0" rIns="0" tIns="0" bIns="0">
+            <a:spAutoFit/>
+          </a:bodyPr>
+          <a:lstStyle/>
+          <a:p>
+            <a:pPr algn="l">
+              <a:lnSpc>
+                <a:spcPct val="100000"/>
+              </a:lnSpc>
+            </a:pPr>
+            <a:r>
+              <a:rPr sz="1500" b="1" i="0">
+                <a:solidFill>
+                  <a:srgbClr val="ECECF0"/>
+                </a:solidFill>
+                <a:latin typeface="Calibri"/>
+              </a:rPr>
+              <a:t>splitter</a:t>
+            </a:r>
+          </a:p>
+        </p:txBody>
+      </p:sp>
+      <p:sp>
+        <p:nvSpPr>
+          <p:cNvPr id="23" name="TextBox 22"/>
+          <p:cNvSpPr txBox="1"/>
+          <p:nvPr/>
+        </p:nvSpPr>
+        <p:spPr>
+          <a:xfrm>
+            <a:off x="3611880" y="5143499"/>
+            <a:ext cx="2011680" cy="274320"/>
+          </a:xfrm>
+          <a:prstGeom prst="rect">
+            <a:avLst/>
+          </a:prstGeom>
+          <a:noFill/>
+        </p:spPr>
+        <p:txBody>
+          <a:bodyPr wrap="square" lIns="0" rIns="0" tIns="0" bIns="0">
+            <a:spAutoFit/>
+          </a:bodyPr>
+          <a:lstStyle/>
+          <a:p>
+            <a:pPr algn="l">
+              <a:lnSpc>
+                <a:spcPct val="100000"/>
+              </a:lnSpc>
+            </a:pPr>
+            <a:r>
+              <a:rPr sz="1000" b="0" i="1">
+                <a:solidFill>
+                  <a:srgbClr val="F7931A"/>
+                </a:solidFill>
+                <a:latin typeface="Calibri"/>
+              </a:rPr>
+              <a:t>fan-out</a:t>
+            </a:r>
+          </a:p>
+        </p:txBody>
+      </p:sp>
+      <p:sp>
+        <p:nvSpPr>
+          <p:cNvPr id="24" name="TextBox 23"/>
+          <p:cNvSpPr txBox="1"/>
+          <p:nvPr/>
+        </p:nvSpPr>
+        <p:spPr>
+          <a:xfrm>
+            <a:off x="3611880" y="5417819"/>
+            <a:ext cx="2011680" cy="571499"/>
+          </a:xfrm>
+          <a:prstGeom prst="rect">
+            <a:avLst/>
+          </a:prstGeom>
+          <a:noFill/>
+        </p:spPr>
+        <p:txBody>
+          <a:bodyPr wrap="square" lIns="0" rIns="0" tIns="0" bIns="0">
+            <a:spAutoFit/>
+          </a:bodyPr>
+          <a:lstStyle/>
+          <a:p>
+            <a:pPr algn="l">
+              <a:lnSpc>
+                <a:spcPct val="130000"/>
+              </a:lnSpc>
+            </a:pPr>
+            <a:r>
+              <a:rPr sz="1000" b="0" i="0">
+                <a:solidFill>
+                  <a:srgbClr val="FFD580"/>
+                </a:solidFill>
+                <a:latin typeface="Consolas"/>
+              </a:rPr>
+              <a:t>scripts/demo-flow.sh</a:t>
+            </a:r>
+          </a:p>
+          <a:p>
+            <a:pPr algn="l">
+              <a:lnSpc>
+                <a:spcPct val="130000"/>
+              </a:lnSpc>
+            </a:pPr>
+            <a:r>
+              <a:rPr sz="1000" b="0" i="0">
+                <a:solidFill>
+                  <a:srgbClr val="FFD580"/>
+                </a:solidFill>
+                <a:latin typeface="Consolas"/>
+              </a:rPr>
+              <a:t>floor-then-residual</a:t>
+            </a:r>
+          </a:p>
+        </p:txBody>
+      </p:sp>
+      <p:sp>
+        <p:nvSpPr>
+          <p:cNvPr id="25" name="Rounded Rectangle 24"/>
+          <p:cNvSpPr/>
+          <p:nvPr/>
+        </p:nvSpPr>
+        <p:spPr>
+          <a:xfrm>
+            <a:off x="5989320" y="4640579"/>
+            <a:ext cx="2377440" cy="1440179"/>
+          </a:xfrm>
+          <a:prstGeom prst="roundRect">
+            <a:avLst>
+              <a:gd name="adj" fmla="val 6000"/>
+            </a:avLst>
+          </a:prstGeom>
+          <a:solidFill>
+            <a:srgbClr val="222D4A"/>
+          </a:solidFill>
+          <a:ln>
+            <a:noFill/>
+          </a:ln>
+        </p:spPr>
+        <p:style>
+          <a:lnRef idx="1">
+            <a:schemeClr val="accent1"/>
+          </a:lnRef>
+          <a:fillRef idx="3">
+            <a:schemeClr val="accent1"/>
+          </a:fillRef>
+          <a:effectRef idx="2">
+            <a:schemeClr val="accent1"/>
+          </a:effectRef>
+          <a:fontRef idx="minor">
+            <a:schemeClr val="lt1"/>
+          </a:fontRef>
+        </p:style>
+        <p:txBody>
+          <a:bodyPr rtlCol="0" anchor="ctr"/>
+          <a:lstStyle/>
+          <a:p>
+            <a:pPr algn="ctr"/>
+          </a:p>
+        </p:txBody>
+      </p:sp>
+      <p:sp>
+        <p:nvSpPr>
+          <p:cNvPr id="26" name="TextBox 25"/>
+          <p:cNvSpPr txBox="1"/>
+          <p:nvPr/>
+        </p:nvSpPr>
+        <p:spPr>
+          <a:xfrm>
+            <a:off x="6172200" y="4777739"/>
+            <a:ext cx="2011680" cy="365760"/>
+          </a:xfrm>
+          <a:prstGeom prst="rect">
+            <a:avLst/>
+          </a:prstGeom>
+          <a:noFill/>
+        </p:spPr>
+        <p:txBody>
+          <a:bodyPr wrap="square" lIns="0" rIns="0" tIns="0" bIns="0">
+            <a:spAutoFit/>
+          </a:bodyPr>
+          <a:lstStyle/>
+          <a:p>
+            <a:pPr algn="l">
+              <a:lnSpc>
+                <a:spcPct val="100000"/>
+              </a:lnSpc>
+            </a:pPr>
+            <a:r>
+              <a:rPr sz="1500" b="1" i="0">
+                <a:solidFill>
+                  <a:srgbClr val="ECECF0"/>
+                </a:solidFill>
+                <a:latin typeface="Calibri"/>
+              </a:rPr>
+              <a:t>dashboard</a:t>
+            </a:r>
+          </a:p>
+        </p:txBody>
+      </p:sp>
+      <p:sp>
+        <p:nvSpPr>
+          <p:cNvPr id="27" name="TextBox 26"/>
+          <p:cNvSpPr txBox="1"/>
+          <p:nvPr/>
+        </p:nvSpPr>
+        <p:spPr>
+          <a:xfrm>
+            <a:off x="6172200" y="5143499"/>
+            <a:ext cx="2011680" cy="274320"/>
+          </a:xfrm>
+          <a:prstGeom prst="rect">
+            <a:avLst/>
+          </a:prstGeom>
+          <a:noFill/>
+        </p:spPr>
+        <p:txBody>
+          <a:bodyPr wrap="square" lIns="0" rIns="0" tIns="0" bIns="0">
+            <a:spAutoFit/>
+          </a:bodyPr>
+          <a:lstStyle/>
+          <a:p>
+            <a:pPr algn="l">
+              <a:lnSpc>
+                <a:spcPct val="100000"/>
+              </a:lnSpc>
+            </a:pPr>
+            <a:r>
+              <a:rPr sz="1000" b="0" i="1">
+                <a:solidFill>
+                  <a:srgbClr val="F7931A"/>
+                </a:solidFill>
+                <a:latin typeface="Calibri"/>
+              </a:rPr>
+              <a:t>live UI</a:t>
+            </a:r>
+          </a:p>
+        </p:txBody>
+      </p:sp>
+      <p:sp>
+        <p:nvSpPr>
+          <p:cNvPr id="28" name="TextBox 27"/>
+          <p:cNvSpPr txBox="1"/>
+          <p:nvPr/>
+        </p:nvSpPr>
+        <p:spPr>
+          <a:xfrm>
+            <a:off x="6172200" y="5417819"/>
+            <a:ext cx="2011680" cy="571499"/>
+          </a:xfrm>
+          <a:prstGeom prst="rect">
+            <a:avLst/>
+          </a:prstGeom>
+          <a:noFill/>
+        </p:spPr>
+        <p:txBody>
+          <a:bodyPr wrap="square" lIns="0" rIns="0" tIns="0" bIns="0">
+            <a:spAutoFit/>
+          </a:bodyPr>
+          <a:lstStyle/>
+          <a:p>
+            <a:pPr algn="l">
+              <a:lnSpc>
+                <a:spcPct val="130000"/>
+              </a:lnSpc>
+            </a:pPr>
+            <a:r>
+              <a:rPr sz="1000" b="0" i="0">
+                <a:solidFill>
+                  <a:srgbClr val="FFD580"/>
+                </a:solidFill>
+                <a:latin typeface="Consolas"/>
+              </a:rPr>
+              <a:t>/api/payouts/stream</a:t>
+            </a:r>
+          </a:p>
+          <a:p>
+            <a:pPr algn="l">
+              <a:lnSpc>
+                <a:spcPct val="130000"/>
+              </a:lnSpc>
+            </a:pPr>
+            <a:r>
+              <a:rPr sz="1000" b="0" i="0">
+                <a:solidFill>
+                  <a:srgbClr val="FFD580"/>
+                </a:solidFill>
+                <a:latin typeface="Consolas"/>
+              </a:rPr>
+              <a:t>SSE  ·  2-phase</a:t>
+            </a:r>
+          </a:p>
+        </p:txBody>
+      </p:sp>
+      <p:sp>
+        <p:nvSpPr>
+          <p:cNvPr id="29" name="Rounded Rectangle 28"/>
+          <p:cNvSpPr/>
+          <p:nvPr/>
+        </p:nvSpPr>
+        <p:spPr>
+          <a:xfrm>
+            <a:off x="9144000" y="2331720"/>
+            <a:ext cx="2468880" cy="1783080"/>
           </a:xfrm>
           <a:prstGeom prst="roundRect">
             <a:avLst>
@@ -3742,14 +4595,14 @@
       </p:sp>
       <p:sp>
         <p:nvSpPr>
-          <p:cNvPr id="11" name="TextBox 10"/>
+          <p:cNvPr id="30" name="TextBox 29"/>
           <p:cNvSpPr txBox="1"/>
           <p:nvPr/>
         </p:nvSpPr>
         <p:spPr>
           <a:xfrm>
-            <a:off x="6643116" y="3063240"/>
-            <a:ext cx="4631436" cy="640080"/>
+            <a:off x="9144000" y="2560320"/>
+            <a:ext cx="2468880" cy="457200"/>
           </a:xfrm>
           <a:prstGeom prst="rect">
             <a:avLst/>
@@ -3762,33 +4615,33 @@
           </a:bodyPr>
           <a:lstStyle/>
           <a:p>
-            <a:pPr algn="l">
+            <a:pPr algn="ctr">
               <a:lnSpc>
                 <a:spcPct val="100000"/>
               </a:lnSpc>
             </a:pPr>
             <a:r>
-              <a:rPr sz="3000" b="1" i="0">
+              <a:rPr sz="2000" b="1" i="0">
                 <a:solidFill>
                   <a:srgbClr val="F7931A"/>
                 </a:solidFill>
                 <a:latin typeface="Calibri"/>
               </a:rPr>
-              <a:t>MoneyDevKit 0.16</a:t>
-            </a:r>
-          </a:p>
-        </p:txBody>
-      </p:sp>
-      <p:sp>
-        <p:nvSpPr>
-          <p:cNvPr id="12" name="TextBox 11"/>
+              <a:t>Lightning</a:t>
+            </a:r>
+          </a:p>
+        </p:txBody>
+      </p:sp>
+      <p:sp>
+        <p:nvSpPr>
+          <p:cNvPr id="31" name="TextBox 30"/>
           <p:cNvSpPr txBox="1"/>
           <p:nvPr/>
         </p:nvSpPr>
         <p:spPr>
           <a:xfrm>
-            <a:off x="6643116" y="3703320"/>
-            <a:ext cx="4631436" cy="457200"/>
+            <a:off x="9144000" y="3063240"/>
+            <a:ext cx="2468880" cy="365760"/>
           </a:xfrm>
           <a:prstGeom prst="rect">
             <a:avLst/>
@@ -3801,7 +4654,7 @@
           </a:bodyPr>
           <a:lstStyle/>
           <a:p>
-            <a:pPr algn="l">
+            <a:pPr algn="ctr">
               <a:lnSpc>
                 <a:spcPct val="100000"/>
               </a:lnSpc>
@@ -3809,25 +4662,64 @@
             <a:r>
               <a:rPr sz="1400" b="0" i="0">
                 <a:solidFill>
+                  <a:srgbClr val="ECECF0"/>
+                </a:solidFill>
+                <a:latin typeface="Calibri"/>
+              </a:rPr>
+              <a:t>Bitcoin mainnet</a:t>
+            </a:r>
+          </a:p>
+        </p:txBody>
+      </p:sp>
+      <p:sp>
+        <p:nvSpPr>
+          <p:cNvPr id="32" name="TextBox 31"/>
+          <p:cNvSpPr txBox="1"/>
+          <p:nvPr/>
+        </p:nvSpPr>
+        <p:spPr>
+          <a:xfrm>
+            <a:off x="9144000" y="3474720"/>
+            <a:ext cx="2468880" cy="365760"/>
+          </a:xfrm>
+          <a:prstGeom prst="rect">
+            <a:avLst/>
+          </a:prstGeom>
+          <a:noFill/>
+        </p:spPr>
+        <p:txBody>
+          <a:bodyPr wrap="square" lIns="0" rIns="0" tIns="0" bIns="0">
+            <a:spAutoFit/>
+          </a:bodyPr>
+          <a:lstStyle/>
+          <a:p>
+            <a:pPr algn="ctr">
+              <a:lnSpc>
+                <a:spcPct val="100000"/>
+              </a:lnSpc>
+            </a:pPr>
+            <a:r>
+              <a:rPr sz="1100" b="0" i="0">
+                <a:solidFill>
                   <a:srgbClr val="8B93A7"/>
                 </a:solidFill>
                 <a:latin typeface="Consolas"/>
               </a:rPr>
-              <a:t>@moneydevkit/nextjs · withPayment</a:t>
-            </a:r>
-          </a:p>
-        </p:txBody>
-      </p:sp>
-      <p:sp>
-        <p:nvSpPr>
-          <p:cNvPr id="13" name="Rounded Rectangle 12"/>
+              <a:t>BOLT11 invoices</a:t>
+            </a:r>
+          </a:p>
+        </p:txBody>
+      </p:sp>
+      <p:sp>
+        <p:nvSpPr>
+          <p:cNvPr id="33" name="Rounded Rectangle 32"/>
           <p:cNvSpPr/>
           <p:nvPr/>
         </p:nvSpPr>
         <p:spPr>
           <a:xfrm>
-            <a:off x="548640" y="4572000"/>
-            <a:ext cx="5362956" cy="1463040"/>
+            <a:off x="9144000" y="4343400"/>
+            <a:ext cx="2468880" cy="1920240"/>
           </a:xfrm>
           <a:prstGeom prst="roundRect">
             <a:avLst>
@@ -3865,14 +4757,14 @@
       </p:sp>
       <p:sp>
         <p:nvSpPr>
-          <p:cNvPr id="14" name="TextBox 13"/>
+          <p:cNvPr id="34" name="TextBox 33"/>
           <p:cNvSpPr txBox="1"/>
           <p:nvPr/>
         </p:nvSpPr>
         <p:spPr>
           <a:xfrm>
-            <a:off x="914400" y="4800600"/>
-            <a:ext cx="4631436" cy="640080"/>
+            <a:off x="9144000" y="4526280"/>
+            <a:ext cx="2468880" cy="457200"/>
           </a:xfrm>
           <a:prstGeom prst="rect">
             <a:avLst/>
@@ -3885,33 +4777,33 @@
           </a:bodyPr>
           <a:lstStyle/>
           <a:p>
-            <a:pPr algn="l">
+            <a:pPr algn="ctr">
               <a:lnSpc>
                 <a:spcPct val="100000"/>
               </a:lnSpc>
             </a:pPr>
             <a:r>
-              <a:rPr sz="3000" b="1" i="0">
+              <a:rPr sz="1800" b="1" i="0">
                 <a:solidFill>
                   <a:srgbClr val="F7931A"/>
                 </a:solidFill>
                 <a:latin typeface="Calibri"/>
               </a:rPr>
-              <a:t>L402</a:t>
-            </a:r>
-          </a:p>
-        </p:txBody>
-      </p:sp>
-      <p:sp>
-        <p:nvSpPr>
-          <p:cNvPr id="15" name="TextBox 14"/>
+              <a:t>Contributors</a:t>
+            </a:r>
+          </a:p>
+        </p:txBody>
+      </p:sp>
+      <p:sp>
+        <p:nvSpPr>
+          <p:cNvPr id="35" name="TextBox 34"/>
           <p:cNvSpPr txBox="1"/>
           <p:nvPr/>
         </p:nvSpPr>
         <p:spPr>
           <a:xfrm>
-            <a:off x="914400" y="5440680"/>
-            <a:ext cx="4631436" cy="457200"/>
+            <a:off x="9144000" y="5029200"/>
+            <a:ext cx="2468880" cy="365760"/>
           </a:xfrm>
           <a:prstGeom prst="rect">
             <a:avLst/>
@@ -3924,41 +4816,39 @@
           </a:bodyPr>
           <a:lstStyle/>
           <a:p>
-            <a:pPr algn="l">
+            <a:pPr algn="ctr">
               <a:lnSpc>
                 <a:spcPct val="100000"/>
               </a:lnSpc>
             </a:pPr>
             <a:r>
-              <a:rPr sz="1400" b="0" i="0">
-                <a:solidFill>
-                  <a:srgbClr val="8B93A7"/>
+              <a:rPr sz="1100" b="0" i="0">
+                <a:solidFill>
+                  <a:srgbClr val="ECECF0"/>
                 </a:solidFill>
                 <a:latin typeface="Consolas"/>
               </a:rPr>
-              <a:t>HTTP 402 + Lightning invoice + macaroon</a:t>
-            </a:r>
-          </a:p>
-        </p:txBody>
-      </p:sp>
-      <p:sp>
-        <p:nvSpPr>
-          <p:cNvPr id="16" name="Rounded Rectangle 15"/>
+              <a:t>BOLT12  /  LN-Address</a:t>
+            </a:r>
+          </a:p>
+        </p:txBody>
+      </p:sp>
+      <p:sp>
+        <p:nvSpPr>
+          <p:cNvPr id="36" name="Oval 35"/>
           <p:cNvSpPr/>
           <p:nvPr/>
         </p:nvSpPr>
         <p:spPr>
           <a:xfrm>
-            <a:off x="6277356" y="4572000"/>
-            <a:ext cx="5362956" cy="1463040"/>
-          </a:xfrm>
-          <a:prstGeom prst="roundRect">
-            <a:avLst>
-              <a:gd name="adj" fmla="val 6000"/>
-            </a:avLst>
+            <a:off x="9363456" y="5577840"/>
+            <a:ext cx="310896" cy="310896"/>
+          </a:xfrm>
+          <a:prstGeom prst="ellipse">
+            <a:avLst/>
           </a:prstGeom>
           <a:solidFill>
-            <a:srgbClr val="182138"/>
+            <a:srgbClr val="FFD580"/>
           </a:solidFill>
           <a:ln>
             <a:noFill/>
@@ -3988,14 +4878,229 @@
       </p:sp>
       <p:sp>
         <p:nvSpPr>
-          <p:cNvPr id="17" name="TextBox 16"/>
+          <p:cNvPr id="37" name="Oval 36"/>
+          <p:cNvSpPr/>
+          <p:nvPr/>
+        </p:nvSpPr>
+        <p:spPr>
+          <a:xfrm>
+            <a:off x="9793224" y="5577840"/>
+            <a:ext cx="310896" cy="310896"/>
+          </a:xfrm>
+          <a:prstGeom prst="ellipse">
+            <a:avLst/>
+          </a:prstGeom>
+          <a:solidFill>
+            <a:srgbClr val="FFD580"/>
+          </a:solidFill>
+          <a:ln>
+            <a:noFill/>
+          </a:ln>
+        </p:spPr>
+        <p:style>
+          <a:lnRef idx="1">
+            <a:schemeClr val="accent1"/>
+          </a:lnRef>
+          <a:fillRef idx="3">
+            <a:schemeClr val="accent1"/>
+          </a:fillRef>
+          <a:effectRef idx="2">
+            <a:schemeClr val="accent1"/>
+          </a:effectRef>
+          <a:fontRef idx="minor">
+            <a:schemeClr val="lt1"/>
+          </a:fontRef>
+        </p:style>
+        <p:txBody>
+          <a:bodyPr rtlCol="0" anchor="ctr"/>
+          <a:lstStyle/>
+          <a:p>
+            <a:pPr algn="ctr"/>
+          </a:p>
+        </p:txBody>
+      </p:sp>
+      <p:sp>
+        <p:nvSpPr>
+          <p:cNvPr id="38" name="Oval 37"/>
+          <p:cNvSpPr/>
+          <p:nvPr/>
+        </p:nvSpPr>
+        <p:spPr>
+          <a:xfrm>
+            <a:off x="10222992" y="5577840"/>
+            <a:ext cx="310896" cy="310896"/>
+          </a:xfrm>
+          <a:prstGeom prst="ellipse">
+            <a:avLst/>
+          </a:prstGeom>
+          <a:solidFill>
+            <a:srgbClr val="FFD580"/>
+          </a:solidFill>
+          <a:ln>
+            <a:noFill/>
+          </a:ln>
+        </p:spPr>
+        <p:style>
+          <a:lnRef idx="1">
+            <a:schemeClr val="accent1"/>
+          </a:lnRef>
+          <a:fillRef idx="3">
+            <a:schemeClr val="accent1"/>
+          </a:fillRef>
+          <a:effectRef idx="2">
+            <a:schemeClr val="accent1"/>
+          </a:effectRef>
+          <a:fontRef idx="minor">
+            <a:schemeClr val="lt1"/>
+          </a:fontRef>
+        </p:style>
+        <p:txBody>
+          <a:bodyPr rtlCol="0" anchor="ctr"/>
+          <a:lstStyle/>
+          <a:p>
+            <a:pPr algn="ctr"/>
+          </a:p>
+        </p:txBody>
+      </p:sp>
+      <p:sp>
+        <p:nvSpPr>
+          <p:cNvPr id="39" name="Oval 38"/>
+          <p:cNvSpPr/>
+          <p:nvPr/>
+        </p:nvSpPr>
+        <p:spPr>
+          <a:xfrm>
+            <a:off x="10652760" y="5577840"/>
+            <a:ext cx="310896" cy="310896"/>
+          </a:xfrm>
+          <a:prstGeom prst="ellipse">
+            <a:avLst/>
+          </a:prstGeom>
+          <a:solidFill>
+            <a:srgbClr val="FFD580"/>
+          </a:solidFill>
+          <a:ln>
+            <a:noFill/>
+          </a:ln>
+        </p:spPr>
+        <p:style>
+          <a:lnRef idx="1">
+            <a:schemeClr val="accent1"/>
+          </a:lnRef>
+          <a:fillRef idx="3">
+            <a:schemeClr val="accent1"/>
+          </a:fillRef>
+          <a:effectRef idx="2">
+            <a:schemeClr val="accent1"/>
+          </a:effectRef>
+          <a:fontRef idx="minor">
+            <a:schemeClr val="lt1"/>
+          </a:fontRef>
+        </p:style>
+        <p:txBody>
+          <a:bodyPr rtlCol="0" anchor="ctr"/>
+          <a:lstStyle/>
+          <a:p>
+            <a:pPr algn="ctr"/>
+          </a:p>
+        </p:txBody>
+      </p:sp>
+      <p:sp>
+        <p:nvSpPr>
+          <p:cNvPr id="40" name="Oval 39"/>
+          <p:cNvSpPr/>
+          <p:nvPr/>
+        </p:nvSpPr>
+        <p:spPr>
+          <a:xfrm>
+            <a:off x="11082528" y="5577840"/>
+            <a:ext cx="310896" cy="310896"/>
+          </a:xfrm>
+          <a:prstGeom prst="ellipse">
+            <a:avLst/>
+          </a:prstGeom>
+          <a:solidFill>
+            <a:srgbClr val="FFD580"/>
+          </a:solidFill>
+          <a:ln>
+            <a:noFill/>
+          </a:ln>
+        </p:spPr>
+        <p:style>
+          <a:lnRef idx="1">
+            <a:schemeClr val="accent1"/>
+          </a:lnRef>
+          <a:fillRef idx="3">
+            <a:schemeClr val="accent1"/>
+          </a:fillRef>
+          <a:effectRef idx="2">
+            <a:schemeClr val="accent1"/>
+          </a:effectRef>
+          <a:fontRef idx="minor">
+            <a:schemeClr val="lt1"/>
+          </a:fontRef>
+        </p:style>
+        <p:txBody>
+          <a:bodyPr rtlCol="0" anchor="ctr"/>
+          <a:lstStyle/>
+          <a:p>
+            <a:pPr algn="ctr"/>
+          </a:p>
+        </p:txBody>
+      </p:sp>
+      <p:sp>
+        <p:nvSpPr>
+          <p:cNvPr id="41" name="Right Arrow 40"/>
+          <p:cNvSpPr/>
+          <p:nvPr/>
+        </p:nvSpPr>
+        <p:spPr>
+          <a:xfrm>
+            <a:off x="2697480" y="4160520"/>
+            <a:ext cx="365760" cy="292608"/>
+          </a:xfrm>
+          <a:prstGeom prst="rightArrow">
+            <a:avLst/>
+          </a:prstGeom>
+          <a:solidFill>
+            <a:srgbClr val="F7931A"/>
+          </a:solidFill>
+          <a:ln>
+            <a:noFill/>
+          </a:ln>
+        </p:spPr>
+        <p:style>
+          <a:lnRef idx="1">
+            <a:schemeClr val="accent1"/>
+          </a:lnRef>
+          <a:fillRef idx="3">
+            <a:schemeClr val="accent1"/>
+          </a:fillRef>
+          <a:effectRef idx="2">
+            <a:schemeClr val="accent1"/>
+          </a:effectRef>
+          <a:fontRef idx="minor">
+            <a:schemeClr val="lt1"/>
+          </a:fontRef>
+        </p:style>
+        <p:txBody>
+          <a:bodyPr rtlCol="0" anchor="ctr"/>
+          <a:lstStyle/>
+          <a:p>
+            <a:pPr algn="ctr"/>
+          </a:p>
+        </p:txBody>
+      </p:sp>
+      <p:sp>
+        <p:nvSpPr>
+          <p:cNvPr id="42" name="TextBox 41"/>
           <p:cNvSpPr txBox="1"/>
           <p:nvPr/>
         </p:nvSpPr>
         <p:spPr>
           <a:xfrm>
-            <a:off x="6643116" y="4800600"/>
-            <a:ext cx="4631436" cy="640080"/>
+            <a:off x="2651760" y="3794760"/>
+            <a:ext cx="457200" cy="274320"/>
           </a:xfrm>
           <a:prstGeom prst="rect">
             <a:avLst/>
@@ -4008,33 +5113,33 @@
           </a:bodyPr>
           <a:lstStyle/>
           <a:p>
-            <a:pPr algn="l">
+            <a:pPr algn="ctr">
               <a:lnSpc>
                 <a:spcPct val="100000"/>
               </a:lnSpc>
             </a:pPr>
             <a:r>
-              <a:rPr sz="3000" b="1" i="0">
-                <a:solidFill>
-                  <a:srgbClr val="F7931A"/>
+              <a:rPr sz="1000" b="1" i="0">
+                <a:solidFill>
+                  <a:srgbClr val="ECECF0"/>
                 </a:solidFill>
                 <a:latin typeface="Calibri"/>
               </a:rPr>
-              <a:t>Bitcoin mainnet</a:t>
-            </a:r>
-          </a:p>
-        </p:txBody>
-      </p:sp>
-      <p:sp>
-        <p:nvSpPr>
-          <p:cNvPr id="18" name="TextBox 17"/>
+              <a:t>1.  call</a:t>
+            </a:r>
+          </a:p>
+        </p:txBody>
+      </p:sp>
+      <p:sp>
+        <p:nvSpPr>
+          <p:cNvPr id="43" name="TextBox 42"/>
           <p:cNvSpPr txBox="1"/>
           <p:nvPr/>
         </p:nvSpPr>
         <p:spPr>
           <a:xfrm>
-            <a:off x="6643116" y="5440680"/>
-            <a:ext cx="4631436" cy="457200"/>
+            <a:off x="2651760" y="4480560"/>
+            <a:ext cx="457200" cy="274320"/>
           </a:xfrm>
           <a:prstGeom prst="rect">
             <a:avLst/>
@@ -4047,19 +5152,261 @@
           </a:bodyPr>
           <a:lstStyle/>
           <a:p>
-            <a:pPr algn="l">
+            <a:pPr algn="ctr">
               <a:lnSpc>
                 <a:spcPct val="100000"/>
               </a:lnSpc>
             </a:pPr>
             <a:r>
-              <a:rPr sz="1400" b="0" i="0">
+              <a:rPr sz="900" b="0" i="0">
                 <a:solidFill>
                   <a:srgbClr val="8B93A7"/>
                 </a:solidFill>
-                <a:latin typeface="Consolas"/>
-              </a:rPr>
-              <a:t>BOLT11 / BOLT12 · real sats</a:t>
+                <a:latin typeface="Calibri"/>
+              </a:rPr>
+              <a:t>← answer</a:t>
+            </a:r>
+          </a:p>
+        </p:txBody>
+      </p:sp>
+      <p:sp>
+        <p:nvSpPr>
+          <p:cNvPr id="44" name="Right Arrow 43"/>
+          <p:cNvSpPr/>
+          <p:nvPr/>
+        </p:nvSpPr>
+        <p:spPr>
+          <a:xfrm>
+            <a:off x="8641080" y="3108960"/>
+            <a:ext cx="365760" cy="292608"/>
+          </a:xfrm>
+          <a:prstGeom prst="rightArrow">
+            <a:avLst/>
+          </a:prstGeom>
+          <a:solidFill>
+            <a:srgbClr val="F7931A"/>
+          </a:solidFill>
+          <a:ln>
+            <a:noFill/>
+          </a:ln>
+        </p:spPr>
+        <p:style>
+          <a:lnRef idx="1">
+            <a:schemeClr val="accent1"/>
+          </a:lnRef>
+          <a:fillRef idx="3">
+            <a:schemeClr val="accent1"/>
+          </a:fillRef>
+          <a:effectRef idx="2">
+            <a:schemeClr val="accent1"/>
+          </a:effectRef>
+          <a:fontRef idx="minor">
+            <a:schemeClr val="lt1"/>
+          </a:fontRef>
+        </p:style>
+        <p:txBody>
+          <a:bodyPr rtlCol="0" anchor="ctr"/>
+          <a:lstStyle/>
+          <a:p>
+            <a:pPr algn="ctr"/>
+          </a:p>
+        </p:txBody>
+      </p:sp>
+      <p:sp>
+        <p:nvSpPr>
+          <p:cNvPr id="45" name="TextBox 44"/>
+          <p:cNvSpPr txBox="1"/>
+          <p:nvPr/>
+        </p:nvSpPr>
+        <p:spPr>
+          <a:xfrm>
+            <a:off x="8595360" y="2743200"/>
+            <a:ext cx="457200" cy="274320"/>
+          </a:xfrm>
+          <a:prstGeom prst="rect">
+            <a:avLst/>
+          </a:prstGeom>
+          <a:noFill/>
+        </p:spPr>
+        <p:txBody>
+          <a:bodyPr wrap="square" lIns="0" rIns="0" tIns="0" bIns="0">
+            <a:spAutoFit/>
+          </a:bodyPr>
+          <a:lstStyle/>
+          <a:p>
+            <a:pPr algn="ctr">
+              <a:lnSpc>
+                <a:spcPct val="100000"/>
+              </a:lnSpc>
+            </a:pPr>
+            <a:r>
+              <a:rPr sz="900" b="1" i="0">
+                <a:solidFill>
+                  <a:srgbClr val="ECECF0"/>
+                </a:solidFill>
+                <a:latin typeface="Calibri"/>
+              </a:rPr>
+              <a:t>2.  invoice</a:t>
+            </a:r>
+          </a:p>
+        </p:txBody>
+      </p:sp>
+      <p:sp>
+        <p:nvSpPr>
+          <p:cNvPr id="46" name="TextBox 45"/>
+          <p:cNvSpPr txBox="1"/>
+          <p:nvPr/>
+        </p:nvSpPr>
+        <p:spPr>
+          <a:xfrm>
+            <a:off x="8595360" y="3429000"/>
+            <a:ext cx="457200" cy="274320"/>
+          </a:xfrm>
+          <a:prstGeom prst="rect">
+            <a:avLst/>
+          </a:prstGeom>
+          <a:noFill/>
+        </p:spPr>
+        <p:txBody>
+          <a:bodyPr wrap="square" lIns="0" rIns="0" tIns="0" bIns="0">
+            <a:spAutoFit/>
+          </a:bodyPr>
+          <a:lstStyle/>
+          <a:p>
+            <a:pPr algn="ctr">
+              <a:lnSpc>
+                <a:spcPct val="100000"/>
+              </a:lnSpc>
+            </a:pPr>
+            <a:r>
+              <a:rPr sz="800" b="0" i="0">
+                <a:solidFill>
+                  <a:srgbClr val="8B93A7"/>
+                </a:solidFill>
+                <a:latin typeface="Calibri"/>
+              </a:rPr>
+              <a:t>← preimage</a:t>
+            </a:r>
+          </a:p>
+        </p:txBody>
+      </p:sp>
+      <p:sp>
+        <p:nvSpPr>
+          <p:cNvPr id="47" name="Right Arrow 46"/>
+          <p:cNvSpPr/>
+          <p:nvPr/>
+        </p:nvSpPr>
+        <p:spPr>
+          <a:xfrm>
+            <a:off x="8641080" y="5212080"/>
+            <a:ext cx="365760" cy="292608"/>
+          </a:xfrm>
+          <a:prstGeom prst="rightArrow">
+            <a:avLst/>
+          </a:prstGeom>
+          <a:solidFill>
+            <a:srgbClr val="F7931A"/>
+          </a:solidFill>
+          <a:ln>
+            <a:noFill/>
+          </a:ln>
+        </p:spPr>
+        <p:style>
+          <a:lnRef idx="1">
+            <a:schemeClr val="accent1"/>
+          </a:lnRef>
+          <a:fillRef idx="3">
+            <a:schemeClr val="accent1"/>
+          </a:fillRef>
+          <a:effectRef idx="2">
+            <a:schemeClr val="accent1"/>
+          </a:effectRef>
+          <a:fontRef idx="minor">
+            <a:schemeClr val="lt1"/>
+          </a:fontRef>
+        </p:style>
+        <p:txBody>
+          <a:bodyPr rtlCol="0" anchor="ctr"/>
+          <a:lstStyle/>
+          <a:p>
+            <a:pPr algn="ctr"/>
+          </a:p>
+        </p:txBody>
+      </p:sp>
+      <p:sp>
+        <p:nvSpPr>
+          <p:cNvPr id="48" name="TextBox 47"/>
+          <p:cNvSpPr txBox="1"/>
+          <p:nvPr/>
+        </p:nvSpPr>
+        <p:spPr>
+          <a:xfrm>
+            <a:off x="8595360" y="4846320"/>
+            <a:ext cx="457200" cy="274320"/>
+          </a:xfrm>
+          <a:prstGeom prst="rect">
+            <a:avLst/>
+          </a:prstGeom>
+          <a:noFill/>
+        </p:spPr>
+        <p:txBody>
+          <a:bodyPr wrap="square" lIns="0" rIns="0" tIns="0" bIns="0">
+            <a:spAutoFit/>
+          </a:bodyPr>
+          <a:lstStyle/>
+          <a:p>
+            <a:pPr algn="ctr">
+              <a:lnSpc>
+                <a:spcPct val="100000"/>
+              </a:lnSpc>
+            </a:pPr>
+            <a:r>
+              <a:rPr sz="900" b="1" i="0">
+                <a:solidFill>
+                  <a:srgbClr val="ECECF0"/>
+                </a:solidFill>
+                <a:latin typeface="Calibri"/>
+              </a:rPr>
+              <a:t>3.  fan-out</a:t>
+            </a:r>
+          </a:p>
+        </p:txBody>
+      </p:sp>
+      <p:sp>
+        <p:nvSpPr>
+          <p:cNvPr id="49" name="TextBox 48"/>
+          <p:cNvSpPr txBox="1"/>
+          <p:nvPr/>
+        </p:nvSpPr>
+        <p:spPr>
+          <a:xfrm>
+            <a:off x="548640" y="6400800"/>
+            <a:ext cx="11091672" cy="365760"/>
+          </a:xfrm>
+          <a:prstGeom prst="rect">
+            <a:avLst/>
+          </a:prstGeom>
+          <a:noFill/>
+        </p:spPr>
+        <p:txBody>
+          <a:bodyPr wrap="square" lIns="0" rIns="0" tIns="0" bIns="0">
+            <a:spAutoFit/>
+          </a:bodyPr>
+          <a:lstStyle/>
+          <a:p>
+            <a:pPr algn="ctr">
+              <a:lnSpc>
+                <a:spcPct val="100000"/>
+              </a:lnSpc>
+            </a:pPr>
+            <a:r>
+              <a:rPr sz="1100" b="0" i="1">
+                <a:solidFill>
+                  <a:srgbClr val="FFD580"/>
+                </a:solidFill>
+                <a:latin typeface="Calibri"/>
+              </a:rPr>
+              <a:t>(1) agent calls API   →   (2) MDK issues + verifies Lightning invoice   →   (3) splitter fans out to all contributors</a:t>
             </a:r>
           </a:p>
         </p:txBody>
@@ -4169,7 +5516,7 @@
                 </a:solidFill>
                 <a:latin typeface="Consolas"/>
               </a:rPr>
-              <a:t>0:18 – 0:28</a:t>
+              <a:t>0:25 – 0:35</a:t>
             </a:r>
           </a:p>
         </p:txBody>
@@ -4226,7 +5573,7 @@
         <p:spPr>
           <a:xfrm>
             <a:off x="777240" y="640080"/>
-            <a:ext cx="4572000" cy="457200"/>
+            <a:ext cx="5486400" cy="457200"/>
           </a:xfrm>
           <a:prstGeom prst="rect">
             <a:avLst/>
@@ -4251,7 +5598,7 @@
                 </a:solidFill>
                 <a:latin typeface="Calibri"/>
               </a:rPr>
-              <a:t>ARCHITECTURE</a:t>
+              <a:t>L402 ZOOM</a:t>
             </a:r>
           </a:p>
         </p:txBody>
@@ -4290,7 +5637,7 @@
                 </a:solidFill>
                 <a:latin typeface="Calibri"/>
               </a:rPr>
-              <a:t>The L402 request flow.</a:t>
+              <a:t>Inside the API route.</a:t>
             </a:r>
           </a:p>
         </p:txBody>
@@ -5280,7 +6627,7 @@
                 </a:solidFill>
                 <a:latin typeface="Consolas"/>
               </a:rPr>
-              <a:t>0:28 – 0:42</a:t>
+              <a:t>0:35 – 0:46</a:t>
             </a:r>
           </a:p>
         </p:txBody>
@@ -5337,7 +6684,7 @@
         <p:spPr>
           <a:xfrm>
             <a:off x="777240" y="640080"/>
-            <a:ext cx="4572000" cy="457200"/>
+            <a:ext cx="5486400" cy="457200"/>
           </a:xfrm>
           <a:prstGeom prst="rect">
             <a:avLst/>
@@ -6298,7 +7645,7 @@
                 </a:solidFill>
                 <a:latin typeface="Consolas"/>
               </a:rPr>
-              <a:t>0:42 – 0:55</a:t>
+              <a:t>0:46 – 0:55</a:t>
             </a:r>
           </a:p>
         </p:txBody>
@@ -6355,7 +7702,7 @@
         <p:spPr>
           <a:xfrm>
             <a:off x="777240" y="640080"/>
-            <a:ext cx="4572000" cy="457200"/>
+            <a:ext cx="5486400" cy="457200"/>
           </a:xfrm>
           <a:prstGeom prst="rect">
             <a:avLst/>

--- a/ayni-pitch/Ayni-tech-deck.pptx
+++ b/ayni-pitch/Ayni-tech-deck.pptx
@@ -6,11 +6,11 @@
   </p:sldMasterIdLst>
   <p:sldIdLst>
     <p:sldId id="256" r:id="rId7"/>
-    <p:sldId id="257" r:id="rId8"/>
-    <p:sldId id="258" r:id="rId9"/>
-    <p:sldId id="259" r:id="rId10"/>
-    <p:sldId id="260" r:id="rId11"/>
-    <p:sldId id="261" r:id="rId12"/>
+    <p:sldId id="257" r:id="rId9"/>
+    <p:sldId id="258" r:id="rId10"/>
+    <p:sldId id="259" r:id="rId11"/>
+    <p:sldId id="260" r:id="rId12"/>
+    <p:sldId id="261" r:id="rId13"/>
   </p:sldIdLst>
   <p:sldSz cx="12191695" cy="6858000" type="screen4x3"/>
   <p:notesSz cx="6858000" cy="9144000"/>
@@ -110,6 +110,886 @@
     </a:lvl9pPr>
   </p:defaultTextStyle>
 </p:presentation>
+</file>
+
+<file path=ppt/notesMasters/notesMaster1.xml><?xml version="1.0" encoding="utf-8"?>
+<p:notesMaster xmlns:a="http://schemas.openxmlformats.org/drawingml/2006/main" xmlns:p="http://schemas.openxmlformats.org/presentationml/2006/main" xmlns:r="http://schemas.openxmlformats.org/officeDocument/2006/relationships">
+  <p:cSld>
+    <p:bg>
+      <p:bgRef idx="1001">
+        <a:schemeClr val="bg1"/>
+      </p:bgRef>
+    </p:bg>
+    <p:spTree>
+      <p:nvGrpSpPr>
+        <p:cNvPr id="1" name=""/>
+        <p:cNvGrpSpPr/>
+        <p:nvPr/>
+      </p:nvGrpSpPr>
+      <p:grpSpPr>
+        <a:xfrm>
+          <a:off x="0" y="0"/>
+          <a:ext cx="0" cy="0"/>
+          <a:chOff x="0" y="0"/>
+          <a:chExt cx="0" cy="0"/>
+        </a:xfrm>
+      </p:grpSpPr>
+      <p:sp>
+        <p:nvSpPr>
+          <p:cNvPr id="2" name="Header Placeholder 1"/>
+          <p:cNvSpPr>
+            <a:spLocks noGrp="1"/>
+          </p:cNvSpPr>
+          <p:nvPr>
+            <p:ph type="hdr" sz="quarter"/>
+          </p:nvPr>
+        </p:nvSpPr>
+        <p:spPr>
+          <a:xfrm>
+            <a:off x="0" y="0"/>
+            <a:ext cx="2971800" cy="457200"/>
+          </a:xfrm>
+          <a:prstGeom prst="rect">
+            <a:avLst/>
+          </a:prstGeom>
+        </p:spPr>
+        <p:txBody>
+          <a:bodyPr vert="horz" lIns="91440" tIns="45720" rIns="91440" bIns="45720" rtlCol="0"/>
+          <a:lstStyle>
+            <a:lvl1pPr algn="l">
+              <a:defRPr sz="1200"/>
+            </a:lvl1pPr>
+          </a:lstStyle>
+          <a:p>
+            <a:endParaRPr lang="en-US"/>
+          </a:p>
+        </p:txBody>
+      </p:sp>
+      <p:sp>
+        <p:nvSpPr>
+          <p:cNvPr id="3" name="Date Placeholder 2"/>
+          <p:cNvSpPr>
+            <a:spLocks noGrp="1"/>
+          </p:cNvSpPr>
+          <p:nvPr>
+            <p:ph type="dt" idx="1"/>
+          </p:nvPr>
+        </p:nvSpPr>
+        <p:spPr>
+          <a:xfrm>
+            <a:off x="3884613" y="0"/>
+            <a:ext cx="2971800" cy="457200"/>
+          </a:xfrm>
+          <a:prstGeom prst="rect">
+            <a:avLst/>
+          </a:prstGeom>
+        </p:spPr>
+        <p:txBody>
+          <a:bodyPr vert="horz" lIns="91440" tIns="45720" rIns="91440" bIns="45720" rtlCol="0"/>
+          <a:lstStyle>
+            <a:lvl1pPr algn="r">
+              <a:defRPr sz="1200"/>
+            </a:lvl1pPr>
+          </a:lstStyle>
+          <a:p>
+            <a:fld id="{0F89C1C7-3DCD-1040-A9CF-14679D8B5DDD}" type="datetimeFigureOut">
+              <a:rPr lang="en-US" smtClean="0"/>
+              <a:t>10/17/16</a:t>
+            </a:fld>
+            <a:endParaRPr lang="en-US"/>
+          </a:p>
+        </p:txBody>
+      </p:sp>
+      <p:sp>
+        <p:nvSpPr>
+          <p:cNvPr id="4" name="Slide Image Placeholder 3"/>
+          <p:cNvSpPr>
+            <a:spLocks noGrp="1" noRot="1" noChangeAspect="1"/>
+          </p:cNvSpPr>
+          <p:nvPr>
+            <p:ph type="sldImg" idx="2"/>
+          </p:nvPr>
+        </p:nvSpPr>
+        <p:spPr>
+          <a:xfrm>
+            <a:off x="1143000" y="685800"/>
+            <a:ext cx="4572000" cy="3429000"/>
+          </a:xfrm>
+          <a:prstGeom prst="rect">
+            <a:avLst/>
+          </a:prstGeom>
+          <a:noFill/>
+          <a:ln w="12700">
+            <a:solidFill>
+              <a:prstClr val="black"/>
+            </a:solidFill>
+          </a:ln>
+        </p:spPr>
+        <p:txBody>
+          <a:bodyPr vert="horz" lIns="91440" tIns="45720" rIns="91440" bIns="45720" rtlCol="0" anchor="ctr"/>
+          <a:lstStyle/>
+          <a:p>
+            <a:endParaRPr lang="en-US"/>
+          </a:p>
+        </p:txBody>
+      </p:sp>
+      <p:sp>
+        <p:nvSpPr>
+          <p:cNvPr id="5" name="Notes Placeholder 4"/>
+          <p:cNvSpPr>
+            <a:spLocks noGrp="1"/>
+          </p:cNvSpPr>
+          <p:nvPr>
+            <p:ph type="body" sz="quarter" idx="3"/>
+          </p:nvPr>
+        </p:nvSpPr>
+        <p:spPr>
+          <a:xfrm>
+            <a:off x="685800" y="4343400"/>
+            <a:ext cx="5486400" cy="4114800"/>
+          </a:xfrm>
+          <a:prstGeom prst="rect">
+            <a:avLst/>
+          </a:prstGeom>
+        </p:spPr>
+        <p:txBody>
+          <a:bodyPr vert="horz" lIns="91440" tIns="45720" rIns="91440" bIns="45720" rtlCol="0"/>
+          <a:lstStyle/>
+          <a:p>
+            <a:pPr lvl="0"/>
+            <a:r>
+              <a:rPr lang="en-US" smtClean="0"/>
+              <a:t>Click to edit Master text styles</a:t>
+            </a:r>
+          </a:p>
+          <a:p>
+            <a:pPr lvl="1"/>
+            <a:r>
+              <a:rPr lang="en-US" smtClean="0"/>
+              <a:t>Second level</a:t>
+            </a:r>
+          </a:p>
+          <a:p>
+            <a:pPr lvl="2"/>
+            <a:r>
+              <a:rPr lang="en-US" smtClean="0"/>
+              <a:t>Third level</a:t>
+            </a:r>
+          </a:p>
+          <a:p>
+            <a:pPr lvl="3"/>
+            <a:r>
+              <a:rPr lang="en-US" smtClean="0"/>
+              <a:t>Fourth level</a:t>
+            </a:r>
+          </a:p>
+          <a:p>
+            <a:pPr lvl="4"/>
+            <a:r>
+              <a:rPr lang="en-US" smtClean="0"/>
+              <a:t>Fifth level</a:t>
+            </a:r>
+            <a:endParaRPr lang="en-US"/>
+          </a:p>
+        </p:txBody>
+      </p:sp>
+      <p:sp>
+        <p:nvSpPr>
+          <p:cNvPr id="6" name="Footer Placeholder 5"/>
+          <p:cNvSpPr>
+            <a:spLocks noGrp="1"/>
+          </p:cNvSpPr>
+          <p:nvPr>
+            <p:ph type="ftr" sz="quarter" idx="4"/>
+          </p:nvPr>
+        </p:nvSpPr>
+        <p:spPr>
+          <a:xfrm>
+            <a:off x="0" y="8685213"/>
+            <a:ext cx="2971800" cy="457200"/>
+          </a:xfrm>
+          <a:prstGeom prst="rect">
+            <a:avLst/>
+          </a:prstGeom>
+        </p:spPr>
+        <p:txBody>
+          <a:bodyPr vert="horz" lIns="91440" tIns="45720" rIns="91440" bIns="45720" rtlCol="0" anchor="b"/>
+          <a:lstStyle>
+            <a:lvl1pPr algn="l">
+              <a:defRPr sz="1200"/>
+            </a:lvl1pPr>
+          </a:lstStyle>
+          <a:p>
+            <a:endParaRPr lang="en-US"/>
+          </a:p>
+        </p:txBody>
+      </p:sp>
+      <p:sp>
+        <p:nvSpPr>
+          <p:cNvPr id="7" name="Slide Number Placeholder 6"/>
+          <p:cNvSpPr>
+            <a:spLocks noGrp="1"/>
+          </p:cNvSpPr>
+          <p:nvPr>
+            <p:ph type="sldNum" sz="quarter" idx="5"/>
+          </p:nvPr>
+        </p:nvSpPr>
+        <p:spPr>
+          <a:xfrm>
+            <a:off x="3884613" y="8685213"/>
+            <a:ext cx="2971800" cy="457200"/>
+          </a:xfrm>
+          <a:prstGeom prst="rect">
+            <a:avLst/>
+          </a:prstGeom>
+        </p:spPr>
+        <p:txBody>
+          <a:bodyPr vert="horz" lIns="91440" tIns="45720" rIns="91440" bIns="45720" rtlCol="0" anchor="b"/>
+          <a:lstStyle>
+            <a:lvl1pPr algn="r">
+              <a:defRPr sz="1200"/>
+            </a:lvl1pPr>
+          </a:lstStyle>
+          <a:p>
+            <a:fld id="{BB5E49A5-4136-284D-997B-48E1D791AD67}" type="slidenum">
+              <a:rPr lang="en-US" smtClean="0"/>
+              <a:t>‹#›</a:t>
+            </a:fld>
+            <a:endParaRPr lang="en-US"/>
+          </a:p>
+        </p:txBody>
+      </p:sp>
+    </p:spTree>
+    <p:extLst>
+      <p:ext uri="{BB962C8B-B14F-4D97-AF65-F5344CB8AC3E}">
+        <p14:creationId xmlns:p14="http://schemas.microsoft.com/office/powerpoint/2010/main" val="2623252185"/>
+      </p:ext>
+    </p:extLst>
+  </p:cSld>
+  <p:clrMap bg1="lt1" tx1="dk1" bg2="lt2" tx2="dk2" accent1="accent1" accent2="accent2" accent3="accent3" accent4="accent4" accent5="accent5" accent6="accent6" hlink="hlink" folHlink="folHlink"/>
+  <p:notesStyle>
+    <a:lvl1pPr marL="0" algn="l" defTabSz="457200" rtl="0" eaLnBrk="1" latinLnBrk="0" hangingPunct="1">
+      <a:defRPr sz="1200" kern="1200">
+        <a:solidFill>
+          <a:schemeClr val="tx1"/>
+        </a:solidFill>
+        <a:latin typeface="+mn-lt"/>
+        <a:ea typeface="+mn-ea"/>
+        <a:cs typeface="+mn-cs"/>
+      </a:defRPr>
+    </a:lvl1pPr>
+    <a:lvl2pPr marL="457200" algn="l" defTabSz="457200" rtl="0" eaLnBrk="1" latinLnBrk="0" hangingPunct="1">
+      <a:defRPr sz="1200" kern="1200">
+        <a:solidFill>
+          <a:schemeClr val="tx1"/>
+        </a:solidFill>
+        <a:latin typeface="+mn-lt"/>
+        <a:ea typeface="+mn-ea"/>
+        <a:cs typeface="+mn-cs"/>
+      </a:defRPr>
+    </a:lvl2pPr>
+    <a:lvl3pPr marL="914400" algn="l" defTabSz="457200" rtl="0" eaLnBrk="1" latinLnBrk="0" hangingPunct="1">
+      <a:defRPr sz="1200" kern="1200">
+        <a:solidFill>
+          <a:schemeClr val="tx1"/>
+        </a:solidFill>
+        <a:latin typeface="+mn-lt"/>
+        <a:ea typeface="+mn-ea"/>
+        <a:cs typeface="+mn-cs"/>
+      </a:defRPr>
+    </a:lvl3pPr>
+    <a:lvl4pPr marL="1371600" algn="l" defTabSz="457200" rtl="0" eaLnBrk="1" latinLnBrk="0" hangingPunct="1">
+      <a:defRPr sz="1200" kern="1200">
+        <a:solidFill>
+          <a:schemeClr val="tx1"/>
+        </a:solidFill>
+        <a:latin typeface="+mn-lt"/>
+        <a:ea typeface="+mn-ea"/>
+        <a:cs typeface="+mn-cs"/>
+      </a:defRPr>
+    </a:lvl4pPr>
+    <a:lvl5pPr marL="1828800" algn="l" defTabSz="457200" rtl="0" eaLnBrk="1" latinLnBrk="0" hangingPunct="1">
+      <a:defRPr sz="1200" kern="1200">
+        <a:solidFill>
+          <a:schemeClr val="tx1"/>
+        </a:solidFill>
+        <a:latin typeface="+mn-lt"/>
+        <a:ea typeface="+mn-ea"/>
+        <a:cs typeface="+mn-cs"/>
+      </a:defRPr>
+    </a:lvl5pPr>
+    <a:lvl6pPr marL="2286000" algn="l" defTabSz="457200" rtl="0" eaLnBrk="1" latinLnBrk="0" hangingPunct="1">
+      <a:defRPr sz="1200" kern="1200">
+        <a:solidFill>
+          <a:schemeClr val="tx1"/>
+        </a:solidFill>
+        <a:latin typeface="+mn-lt"/>
+        <a:ea typeface="+mn-ea"/>
+        <a:cs typeface="+mn-cs"/>
+      </a:defRPr>
+    </a:lvl6pPr>
+    <a:lvl7pPr marL="2743200" algn="l" defTabSz="457200" rtl="0" eaLnBrk="1" latinLnBrk="0" hangingPunct="1">
+      <a:defRPr sz="1200" kern="1200">
+        <a:solidFill>
+          <a:schemeClr val="tx1"/>
+        </a:solidFill>
+        <a:latin typeface="+mn-lt"/>
+        <a:ea typeface="+mn-ea"/>
+        <a:cs typeface="+mn-cs"/>
+      </a:defRPr>
+    </a:lvl7pPr>
+    <a:lvl8pPr marL="3200400" algn="l" defTabSz="457200" rtl="0" eaLnBrk="1" latinLnBrk="0" hangingPunct="1">
+      <a:defRPr sz="1200" kern="1200">
+        <a:solidFill>
+          <a:schemeClr val="tx1"/>
+        </a:solidFill>
+        <a:latin typeface="+mn-lt"/>
+        <a:ea typeface="+mn-ea"/>
+        <a:cs typeface="+mn-cs"/>
+      </a:defRPr>
+    </a:lvl8pPr>
+    <a:lvl9pPr marL="3657600" algn="l" defTabSz="457200" rtl="0" eaLnBrk="1" latinLnBrk="0" hangingPunct="1">
+      <a:defRPr sz="1200" kern="1200">
+        <a:solidFill>
+          <a:schemeClr val="tx1"/>
+        </a:solidFill>
+        <a:latin typeface="+mn-lt"/>
+        <a:ea typeface="+mn-ea"/>
+        <a:cs typeface="+mn-cs"/>
+      </a:defRPr>
+    </a:lvl9pPr>
+  </p:notesStyle>
+</p:notesMaster>
+</file>
+
+<file path=ppt/notesSlides/notesSlide1.xml><?xml version="1.0" encoding="utf-8"?>
+<p:notes xmlns:a="http://schemas.openxmlformats.org/drawingml/2006/main" xmlns:p="http://schemas.openxmlformats.org/presentationml/2006/main" xmlns:r="http://schemas.openxmlformats.org/officeDocument/2006/relationships">
+  <p:cSld>
+    <p:spTree>
+      <p:nvGrpSpPr>
+        <p:cNvPr id="1" name=""/>
+        <p:cNvGrpSpPr/>
+        <p:nvPr/>
+      </p:nvGrpSpPr>
+      <p:grpSpPr>
+        <a:xfrm>
+          <a:off x="0" y="0"/>
+          <a:ext cx="0" cy="0"/>
+          <a:chOff x="0" y="0"/>
+          <a:chExt cx="0" cy="0"/>
+        </a:xfrm>
+      </p:grpSpPr>
+      <p:sp>
+        <p:nvSpPr>
+          <p:cNvPr id="2" name="Slide Image Placeholder 1"/>
+          <p:cNvSpPr>
+            <a:spLocks noGrp="1"/>
+          </p:cNvSpPr>
+          <p:nvPr>
+            <p:ph type="sldImg" idx="2"/>
+          </p:nvPr>
+        </p:nvSpPr>
+        <p:spPr/>
+      </p:sp>
+      <p:sp>
+        <p:nvSpPr>
+          <p:cNvPr id="3" name="Notes Placeholder 2"/>
+          <p:cNvSpPr>
+            <a:spLocks noGrp="1"/>
+          </p:cNvSpPr>
+          <p:nvPr>
+            <p:ph type="body" idx="3" sz="quarter"/>
+          </p:nvPr>
+        </p:nvSpPr>
+        <p:spPr/>
+        <p:txBody>
+          <a:bodyPr/>
+          <a:lstStyle/>
+          <a:p>
+            <a:r>
+              <a:t>[0:00 – 0:08]   HERO</a:t>
+            </a:r>
+          </a:p>
+          <a:p/>
+          <a:p>
+            <a:r>
+              <a:t>Ayni: AI agents pay sub-cent in Lightning, and every payment auto-splits to the contributors who maintain the knowledge.</a:t>
+            </a:r>
+          </a:p>
+          <a:p/>
+          <a:p>
+            <a:r>
+              <a:t>— beat — let it land before clicking to slide 2.</a:t>
+            </a:r>
+          </a:p>
+        </p:txBody>
+      </p:sp>
+      <p:sp>
+        <p:nvSpPr>
+          <p:cNvPr id="4" name="Slide Number Placeholder 3"/>
+          <p:cNvSpPr>
+            <a:spLocks noGrp="1"/>
+          </p:cNvSpPr>
+          <p:nvPr>
+            <p:ph type="sldNum" idx="5" sz="quarter"/>
+          </p:nvPr>
+        </p:nvSpPr>
+        <p:spPr/>
+      </p:sp>
+    </p:spTree>
+  </p:cSld>
+  <p:clrMapOvr>
+    <a:masterClrMapping/>
+  </p:clrMapOvr>
+</p:notes>
+</file>
+
+<file path=ppt/notesSlides/notesSlide2.xml><?xml version="1.0" encoding="utf-8"?>
+<p:notes xmlns:a="http://schemas.openxmlformats.org/drawingml/2006/main" xmlns:p="http://schemas.openxmlformats.org/presentationml/2006/main" xmlns:r="http://schemas.openxmlformats.org/officeDocument/2006/relationships">
+  <p:cSld>
+    <p:spTree>
+      <p:nvGrpSpPr>
+        <p:cNvPr id="1" name=""/>
+        <p:cNvGrpSpPr/>
+        <p:nvPr/>
+      </p:nvGrpSpPr>
+      <p:grpSpPr>
+        <a:xfrm>
+          <a:off x="0" y="0"/>
+          <a:ext cx="0" cy="0"/>
+          <a:chOff x="0" y="0"/>
+          <a:chExt cx="0" cy="0"/>
+        </a:xfrm>
+      </p:grpSpPr>
+      <p:sp>
+        <p:nvSpPr>
+          <p:cNvPr id="2" name="Slide Image Placeholder 1"/>
+          <p:cNvSpPr>
+            <a:spLocks noGrp="1"/>
+          </p:cNvSpPr>
+          <p:nvPr>
+            <p:ph type="sldImg" idx="2"/>
+          </p:nvPr>
+        </p:nvSpPr>
+        <p:spPr/>
+      </p:sp>
+      <p:sp>
+        <p:nvSpPr>
+          <p:cNvPr id="3" name="Notes Placeholder 2"/>
+          <p:cNvSpPr>
+            <a:spLocks noGrp="1"/>
+          </p:cNvSpPr>
+          <p:nvPr>
+            <p:ph type="body" idx="3" sz="quarter"/>
+          </p:nvPr>
+        </p:nvSpPr>
+        <p:spPr/>
+        <p:txBody>
+          <a:bodyPr/>
+          <a:lstStyle/>
+          <a:p>
+            <a:r>
+              <a:t>[0:08 – 0:25]   SYSTEM ARCHITECTURE   ★ centerpiece slide ★</a:t>
+            </a:r>
+          </a:p>
+          <a:p/>
+          <a:p>
+            <a:r>
+              <a:t>(point at the AGENT column on the left)</a:t>
+            </a:r>
+          </a:p>
+          <a:p>
+            <a:r>
+              <a:t>Stack: Next.js 15 on Vercel, MoneyDevKit 0.16, L402 over Bitcoin mainnet.</a:t>
+            </a:r>
+          </a:p>
+          <a:p/>
+          <a:p>
+            <a:r>
+              <a:t>(sweep right, into the AYNI middle container)</a:t>
+            </a:r>
+          </a:p>
+          <a:p>
+            <a:r>
+              <a:t>An agent discovers our endpoints through a public agent-skill manifest, then calls the API.</a:t>
+            </a:r>
+          </a:p>
+          <a:p/>
+          <a:p>
+            <a:r>
+              <a:t>(point at arrow 2 — Ayni → Lightning)</a:t>
+            </a:r>
+          </a:p>
+          <a:p>
+            <a:r>
+              <a:t>The API returns a 402 with a Lightning invoice and a macaroon. The agent's wallet pays. We verify the preimage and return the answer.</a:t>
+            </a:r>
+          </a:p>
+          <a:p/>
+          <a:p>
+            <a:r>
+              <a:t>(point at arrow 3 — Splitter → Contributors)</a:t>
+            </a:r>
+          </a:p>
+          <a:p>
+            <a:r>
+              <a:t>Then the splitter fans out real Lightning sends to each contributor's BOLT12 or Lightning Address.</a:t>
+            </a:r>
+          </a:p>
+          <a:p/>
+          <a:p>
+            <a:r>
+              <a:t>— 17 seconds. Densest slide. Practice this one alone first. Use cursor / laser pointer (Ctrl+L in slideshow mode) to point at each zone in order.</a:t>
+            </a:r>
+          </a:p>
+        </p:txBody>
+      </p:sp>
+      <p:sp>
+        <p:nvSpPr>
+          <p:cNvPr id="4" name="Slide Number Placeholder 3"/>
+          <p:cNvSpPr>
+            <a:spLocks noGrp="1"/>
+          </p:cNvSpPr>
+          <p:nvPr>
+            <p:ph type="sldNum" idx="5" sz="quarter"/>
+          </p:nvPr>
+        </p:nvSpPr>
+        <p:spPr/>
+      </p:sp>
+    </p:spTree>
+  </p:cSld>
+  <p:clrMapOvr>
+    <a:masterClrMapping/>
+  </p:clrMapOvr>
+</p:notes>
+</file>
+
+<file path=ppt/notesSlides/notesSlide3.xml><?xml version="1.0" encoding="utf-8"?>
+<p:notes xmlns:a="http://schemas.openxmlformats.org/drawingml/2006/main" xmlns:p="http://schemas.openxmlformats.org/presentationml/2006/main" xmlns:r="http://schemas.openxmlformats.org/officeDocument/2006/relationships">
+  <p:cSld>
+    <p:spTree>
+      <p:nvGrpSpPr>
+        <p:cNvPr id="1" name=""/>
+        <p:cNvGrpSpPr/>
+        <p:nvPr/>
+      </p:nvGrpSpPr>
+      <p:grpSpPr>
+        <a:xfrm>
+          <a:off x="0" y="0"/>
+          <a:ext cx="0" cy="0"/>
+          <a:chOff x="0" y="0"/>
+          <a:chExt cx="0" cy="0"/>
+        </a:xfrm>
+      </p:grpSpPr>
+      <p:sp>
+        <p:nvSpPr>
+          <p:cNvPr id="2" name="Slide Image Placeholder 1"/>
+          <p:cNvSpPr>
+            <a:spLocks noGrp="1"/>
+          </p:cNvSpPr>
+          <p:nvPr>
+            <p:ph type="sldImg" idx="2"/>
+          </p:nvPr>
+        </p:nvSpPr>
+        <p:spPr/>
+      </p:sp>
+      <p:sp>
+        <p:nvSpPr>
+          <p:cNvPr id="3" name="Notes Placeholder 2"/>
+          <p:cNvSpPr>
+            <a:spLocks noGrp="1"/>
+          </p:cNvSpPr>
+          <p:nvPr>
+            <p:ph type="body" idx="3" sz="quarter"/>
+          </p:nvPr>
+        </p:nvSpPr>
+        <p:spPr/>
+        <p:txBody>
+          <a:bodyPr/>
+          <a:lstStyle/>
+          <a:p>
+            <a:r>
+              <a:t>[0:25 – 0:35]   L402 ZOOM</a:t>
+            </a:r>
+          </a:p>
+          <a:p/>
+          <a:p>
+            <a:r>
+              <a:t>Inside the API route: MDK returns the 402 with the Lightning invoice and macaroon. The agent retries with the preimage. We verify SHA-256 against the payment hash before answering.</a:t>
+            </a:r>
+          </a:p>
+          <a:p/>
+          <a:p>
+            <a:r>
+              <a:t>— stress: "402", "macaroon", "preimage", "SHA-256". 10 seconds.</a:t>
+            </a:r>
+          </a:p>
+        </p:txBody>
+      </p:sp>
+      <p:sp>
+        <p:nvSpPr>
+          <p:cNvPr id="4" name="Slide Number Placeholder 3"/>
+          <p:cNvSpPr>
+            <a:spLocks noGrp="1"/>
+          </p:cNvSpPr>
+          <p:nvPr>
+            <p:ph type="sldNum" idx="5" sz="quarter"/>
+          </p:nvPr>
+        </p:nvSpPr>
+        <p:spPr/>
+      </p:sp>
+    </p:spTree>
+  </p:cSld>
+  <p:clrMapOvr>
+    <a:masterClrMapping/>
+  </p:clrMapOvr>
+</p:notes>
+</file>
+
+<file path=ppt/notesSlides/notesSlide4.xml><?xml version="1.0" encoding="utf-8"?>
+<p:notes xmlns:a="http://schemas.openxmlformats.org/drawingml/2006/main" xmlns:p="http://schemas.openxmlformats.org/presentationml/2006/main" xmlns:r="http://schemas.openxmlformats.org/officeDocument/2006/relationships">
+  <p:cSld>
+    <p:spTree>
+      <p:nvGrpSpPr>
+        <p:cNvPr id="1" name=""/>
+        <p:cNvGrpSpPr/>
+        <p:nvPr/>
+      </p:nvGrpSpPr>
+      <p:grpSpPr>
+        <a:xfrm>
+          <a:off x="0" y="0"/>
+          <a:ext cx="0" cy="0"/>
+          <a:chOff x="0" y="0"/>
+          <a:chExt cx="0" cy="0"/>
+        </a:xfrm>
+      </p:grpSpPr>
+      <p:sp>
+        <p:nvSpPr>
+          <p:cNvPr id="2" name="Slide Image Placeholder 1"/>
+          <p:cNvSpPr>
+            <a:spLocks noGrp="1"/>
+          </p:cNvSpPr>
+          <p:nvPr>
+            <p:ph type="sldImg" idx="2"/>
+          </p:nvPr>
+        </p:nvSpPr>
+        <p:spPr/>
+      </p:sp>
+      <p:sp>
+        <p:nvSpPr>
+          <p:cNvPr id="3" name="Notes Placeholder 2"/>
+          <p:cNvSpPr>
+            <a:spLocks noGrp="1"/>
+          </p:cNvSpPr>
+          <p:nvPr>
+            <p:ph type="body" idx="3" sz="quarter"/>
+          </p:nvPr>
+        </p:nvSpPr>
+        <p:spPr/>
+        <p:txBody>
+          <a:bodyPr/>
+          <a:lstStyle/>
+          <a:p>
+            <a:r>
+              <a:t>[0:35 – 0:46]   ONWARD FAN-OUT</a:t>
+            </a:r>
+          </a:p>
+          <a:p/>
+          <a:p>
+            <a:r>
+              <a:t>The splitter uses floor-then-residual rounding — per-wallet sats sum exactly to the total. A 100-sat call to Tributario PE pays 40-30-10-10-10 to five wallets in seconds.</a:t>
+            </a:r>
+          </a:p>
+          <a:p/>
+          <a:p>
+            <a:r>
+              <a:t>— stress: "floor-then-residual", "exactly", "40-30-10-10-10". 11 seconds.</a:t>
+            </a:r>
+          </a:p>
+        </p:txBody>
+      </p:sp>
+      <p:sp>
+        <p:nvSpPr>
+          <p:cNvPr id="4" name="Slide Number Placeholder 3"/>
+          <p:cNvSpPr>
+            <a:spLocks noGrp="1"/>
+          </p:cNvSpPr>
+          <p:nvPr>
+            <p:ph type="sldNum" idx="5" sz="quarter"/>
+          </p:nvPr>
+        </p:nvSpPr>
+        <p:spPr/>
+      </p:sp>
+    </p:spTree>
+  </p:cSld>
+  <p:clrMapOvr>
+    <a:masterClrMapping/>
+  </p:clrMapOvr>
+</p:notes>
+</file>
+
+<file path=ppt/notesSlides/notesSlide5.xml><?xml version="1.0" encoding="utf-8"?>
+<p:notes xmlns:a="http://schemas.openxmlformats.org/drawingml/2006/main" xmlns:p="http://schemas.openxmlformats.org/presentationml/2006/main" xmlns:r="http://schemas.openxmlformats.org/officeDocument/2006/relationships">
+  <p:cSld>
+    <p:spTree>
+      <p:nvGrpSpPr>
+        <p:cNvPr id="1" name=""/>
+        <p:cNvGrpSpPr/>
+        <p:nvPr/>
+      </p:nvGrpSpPr>
+      <p:grpSpPr>
+        <a:xfrm>
+          <a:off x="0" y="0"/>
+          <a:ext cx="0" cy="0"/>
+          <a:chOff x="0" y="0"/>
+          <a:chExt cx="0" cy="0"/>
+        </a:xfrm>
+      </p:grpSpPr>
+      <p:sp>
+        <p:nvSpPr>
+          <p:cNvPr id="2" name="Slide Image Placeholder 1"/>
+          <p:cNvSpPr>
+            <a:spLocks noGrp="1"/>
+          </p:cNvSpPr>
+          <p:nvPr>
+            <p:ph type="sldImg" idx="2"/>
+          </p:nvPr>
+        </p:nvSpPr>
+        <p:spPr/>
+      </p:sp>
+      <p:sp>
+        <p:nvSpPr>
+          <p:cNvPr id="3" name="Notes Placeholder 2"/>
+          <p:cNvSpPr>
+            <a:spLocks noGrp="1"/>
+          </p:cNvSpPr>
+          <p:nvPr>
+            <p:ph type="body" idx="3" sz="quarter"/>
+          </p:nvPr>
+        </p:nvSpPr>
+        <p:spPr/>
+        <p:txBody>
+          <a:bodyPr/>
+          <a:lstStyle/>
+          <a:p>
+            <a:r>
+              <a:t>[0:46 – 0:55]   IMPLEMENTATION — THE FIX</a:t>
+            </a:r>
+          </a:p>
+          <a:p/>
+          <a:p>
+            <a:r>
+              <a:t>Critical fix: the WebSocket lib and the native Lightning binding broke under webpack. We externalized them and pinned the route to the Node.js runtime. That commit unlocked end-to-end.</a:t>
+            </a:r>
+          </a:p>
+          <a:p/>
+          <a:p>
+            <a:r>
+              <a:t>— stress: "externalized", "Node.js runtime", "unlocked end-to-end". 9 seconds.</a:t>
+            </a:r>
+          </a:p>
+        </p:txBody>
+      </p:sp>
+      <p:sp>
+        <p:nvSpPr>
+          <p:cNvPr id="4" name="Slide Number Placeholder 3"/>
+          <p:cNvSpPr>
+            <a:spLocks noGrp="1"/>
+          </p:cNvSpPr>
+          <p:nvPr>
+            <p:ph type="sldNum" idx="5" sz="quarter"/>
+          </p:nvPr>
+        </p:nvSpPr>
+        <p:spPr/>
+      </p:sp>
+    </p:spTree>
+  </p:cSld>
+  <p:clrMapOvr>
+    <a:masterClrMapping/>
+  </p:clrMapOvr>
+</p:notes>
+</file>
+
+<file path=ppt/notesSlides/notesSlide6.xml><?xml version="1.0" encoding="utf-8"?>
+<p:notes xmlns:a="http://schemas.openxmlformats.org/drawingml/2006/main" xmlns:p="http://schemas.openxmlformats.org/presentationml/2006/main" xmlns:r="http://schemas.openxmlformats.org/officeDocument/2006/relationships">
+  <p:cSld>
+    <p:spTree>
+      <p:nvGrpSpPr>
+        <p:cNvPr id="1" name=""/>
+        <p:cNvGrpSpPr/>
+        <p:nvPr/>
+      </p:nvGrpSpPr>
+      <p:grpSpPr>
+        <a:xfrm>
+          <a:off x="0" y="0"/>
+          <a:ext cx="0" cy="0"/>
+          <a:chOff x="0" y="0"/>
+          <a:chExt cx="0" cy="0"/>
+        </a:xfrm>
+      </p:grpSpPr>
+      <p:sp>
+        <p:nvSpPr>
+          <p:cNvPr id="2" name="Slide Image Placeholder 1"/>
+          <p:cNvSpPr>
+            <a:spLocks noGrp="1"/>
+          </p:cNvSpPr>
+          <p:nvPr>
+            <p:ph type="sldImg" idx="2"/>
+          </p:nvPr>
+        </p:nvSpPr>
+        <p:spPr/>
+      </p:sp>
+      <p:sp>
+        <p:nvSpPr>
+          <p:cNvPr id="3" name="Notes Placeholder 2"/>
+          <p:cNvSpPr>
+            <a:spLocks noGrp="1"/>
+          </p:cNvSpPr>
+          <p:nvPr>
+            <p:ph type="body" idx="3" sz="quarter"/>
+          </p:nvPr>
+        </p:nvSpPr>
+        <p:spPr/>
+        <p:txBody>
+          <a:bodyPr/>
+          <a:lstStyle/>
+          <a:p>
+            <a:r>
+              <a:t>[0:55 – 1:00]   CLOSING</a:t>
+            </a:r>
+          </a:p>
+          <a:p/>
+          <a:p>
+            <a:r>
+              <a:t>Live on mainnet at ayniw.com. MIT on GitHub.</a:t>
+            </a:r>
+          </a:p>
+          <a:p/>
+          <a:p>
+            <a:r>
+              <a:t>— stop talking. Don't read the URL twice. 5 seconds.</a:t>
+            </a:r>
+          </a:p>
+        </p:txBody>
+      </p:sp>
+      <p:sp>
+        <p:nvSpPr>
+          <p:cNvPr id="4" name="Slide Number Placeholder 3"/>
+          <p:cNvSpPr>
+            <a:spLocks noGrp="1"/>
+          </p:cNvSpPr>
+          <p:nvPr>
+            <p:ph type="sldNum" idx="5" sz="quarter"/>
+          </p:nvPr>
+        </p:nvSpPr>
+        <p:spPr/>
+      </p:sp>
+    </p:spTree>
+  </p:cSld>
+  <p:clrMapOvr>
+    <a:masterClrMapping/>
+  </p:clrMapOvr>
+</p:notes>
 </file>
 
 <file path=ppt/slideLayouts/slideLayout1.xml><?xml version="1.0" encoding="utf-8"?>
@@ -9062,4 +9942,324 @@
   </a:objectDefaults>
   <a:extraClrSchemeLst/>
 </a:theme>
+</file>
+
+<file path=ppt/theme/theme2.xml><?xml version="1.0" encoding="utf-8"?>
+<a:theme xmlns:a="http://schemas.openxmlformats.org/drawingml/2006/main" name="Office Theme">
+  <a:themeElements>
+    <a:clrScheme name="Office">
+      <a:dk1>
+        <a:sysClr val="windowText" lastClr="000000"/>
+      </a:dk1>
+      <a:lt1>
+        <a:sysClr val="window" lastClr="FFFFFF"/>
+      </a:lt1>
+      <a:dk2>
+        <a:srgbClr val="1F497D"/>
+      </a:dk2>
+      <a:lt2>
+        <a:srgbClr val="EEECE1"/>
+      </a:lt2>
+      <a:accent1>
+        <a:srgbClr val="4F81BD"/>
+      </a:accent1>
+      <a:accent2>
+        <a:srgbClr val="C0504D"/>
+      </a:accent2>
+      <a:accent3>
+        <a:srgbClr val="9BBB59"/>
+      </a:accent3>
+      <a:accent4>
+        <a:srgbClr val="8064A2"/>
+      </a:accent4>
+      <a:accent5>
+        <a:srgbClr val="4BACC6"/>
+      </a:accent5>
+      <a:accent6>
+        <a:srgbClr val="F79646"/>
+      </a:accent6>
+      <a:hlink>
+        <a:srgbClr val="0000FF"/>
+      </a:hlink>
+      <a:folHlink>
+        <a:srgbClr val="800080"/>
+      </a:folHlink>
+    </a:clrScheme>
+    <a:fontScheme name="Office">
+      <a:majorFont>
+        <a:latin typeface="Calibri"/>
+        <a:ea typeface=""/>
+        <a:cs typeface=""/>
+        <a:font script="Jpan" typeface="ＭＳ Ｐゴシック"/>
+        <a:font script="Hang" typeface="맑은 고딕"/>
+        <a:font script="Hans" typeface="宋体"/>
+        <a:font script="Hant" typeface="新細明體"/>
+        <a:font script="Arab" typeface="Times New Roman"/>
+        <a:font script="Hebr" typeface="Times New Roman"/>
+        <a:font script="Thai" typeface="Angsana New"/>
+        <a:font script="Ethi" typeface="Nyala"/>
+        <a:font script="Beng" typeface="Vrinda"/>
+        <a:font script="Gujr" typeface="Shruti"/>
+        <a:font script="Khmr" typeface="MoolBoran"/>
+        <a:font script="Knda" typeface="Tunga"/>
+        <a:font script="Guru" typeface="Raavi"/>
+        <a:font script="Cans" typeface="Euphemia"/>
+        <a:font script="Cher" typeface="Plantagenet Cherokee"/>
+        <a:font script="Yiii" typeface="Microsoft Yi Baiti"/>
+        <a:font script="Tibt" typeface="Microsoft Himalaya"/>
+        <a:font script="Thaa" typeface="MV Boli"/>
+        <a:font script="Deva" typeface="Mangal"/>
+        <a:font script="Telu" typeface="Gautami"/>
+        <a:font script="Taml" typeface="Latha"/>
+        <a:font script="Syrc" typeface="Estrangelo Edessa"/>
+        <a:font script="Orya" typeface="Kalinga"/>
+        <a:font script="Mlym" typeface="Kartika"/>
+        <a:font script="Laoo" typeface="DokChampa"/>
+        <a:font script="Sinh" typeface="Iskoola Pota"/>
+        <a:font script="Mong" typeface="Mongolian Baiti"/>
+        <a:font script="Viet" typeface="Times New Roman"/>
+        <a:font script="Uigh" typeface="Microsoft Uighur"/>
+        <a:font script="Geor" typeface="Sylfaen"/>
+      </a:majorFont>
+      <a:minorFont>
+        <a:latin typeface="Calibri"/>
+        <a:ea typeface=""/>
+        <a:cs typeface=""/>
+        <a:font script="Jpan" typeface="ＭＳ Ｐゴシック"/>
+        <a:font script="Hang" typeface="맑은 고딕"/>
+        <a:font script="Hans" typeface="宋体"/>
+        <a:font script="Hant" typeface="新細明體"/>
+        <a:font script="Arab" typeface="Arial"/>
+        <a:font script="Hebr" typeface="Arial"/>
+        <a:font script="Thai" typeface="Cordia New"/>
+        <a:font script="Ethi" typeface="Nyala"/>
+        <a:font script="Beng" typeface="Vrinda"/>
+        <a:font script="Gujr" typeface="Shruti"/>
+        <a:font script="Khmr" typeface="DaunPenh"/>
+        <a:font script="Knda" typeface="Tunga"/>
+        <a:font script="Guru" typeface="Raavi"/>
+        <a:font script="Cans" typeface="Euphemia"/>
+        <a:font script="Cher" typeface="Plantagenet Cherokee"/>
+        <a:font script="Yiii" typeface="Microsoft Yi Baiti"/>
+        <a:font script="Tibt" typeface="Microsoft Himalaya"/>
+        <a:font script="Thaa" typeface="MV Boli"/>
+        <a:font script="Deva" typeface="Mangal"/>
+        <a:font script="Telu" typeface="Gautami"/>
+        <a:font script="Taml" typeface="Latha"/>
+        <a:font script="Syrc" typeface="Estrangelo Edessa"/>
+        <a:font script="Orya" typeface="Kalinga"/>
+        <a:font script="Mlym" typeface="Kartika"/>
+        <a:font script="Laoo" typeface="DokChampa"/>
+        <a:font script="Sinh" typeface="Iskoola Pota"/>
+        <a:font script="Mong" typeface="Mongolian Baiti"/>
+        <a:font script="Viet" typeface="Arial"/>
+        <a:font script="Uigh" typeface="Microsoft Uighur"/>
+        <a:font script="Geor" typeface="Sylfaen"/>
+      </a:minorFont>
+    </a:fontScheme>
+    <a:fmtScheme name="Office">
+      <a:fillStyleLst>
+        <a:solidFill>
+          <a:schemeClr val="phClr"/>
+        </a:solidFill>
+        <a:gradFill rotWithShape="1">
+          <a:gsLst>
+            <a:gs pos="0">
+              <a:schemeClr val="phClr">
+                <a:tint val="50000"/>
+                <a:satMod val="300000"/>
+              </a:schemeClr>
+            </a:gs>
+            <a:gs pos="35000">
+              <a:schemeClr val="phClr">
+                <a:tint val="37000"/>
+                <a:satMod val="300000"/>
+              </a:schemeClr>
+            </a:gs>
+            <a:gs pos="100000">
+              <a:schemeClr val="phClr">
+                <a:tint val="15000"/>
+                <a:satMod val="350000"/>
+              </a:schemeClr>
+            </a:gs>
+          </a:gsLst>
+          <a:lin ang="16200000" scaled="1"/>
+        </a:gradFill>
+        <a:gradFill rotWithShape="1">
+          <a:gsLst>
+            <a:gs pos="0">
+              <a:schemeClr val="phClr">
+                <a:tint val="100000"/>
+                <a:shade val="100000"/>
+                <a:satMod val="130000"/>
+              </a:schemeClr>
+            </a:gs>
+            <a:gs pos="100000">
+              <a:schemeClr val="phClr">
+                <a:tint val="50000"/>
+                <a:shade val="100000"/>
+                <a:satMod val="350000"/>
+              </a:schemeClr>
+            </a:gs>
+          </a:gsLst>
+          <a:lin ang="16200000" scaled="0"/>
+        </a:gradFill>
+      </a:fillStyleLst>
+      <a:lnStyleLst>
+        <a:ln w="9525" cap="flat" cmpd="sng" algn="ctr">
+          <a:solidFill>
+            <a:schemeClr val="phClr">
+              <a:shade val="95000"/>
+              <a:satMod val="105000"/>
+            </a:schemeClr>
+          </a:solidFill>
+          <a:prstDash val="solid"/>
+        </a:ln>
+        <a:ln w="25400" cap="flat" cmpd="sng" algn="ctr">
+          <a:solidFill>
+            <a:schemeClr val="phClr"/>
+          </a:solidFill>
+          <a:prstDash val="solid"/>
+        </a:ln>
+        <a:ln w="38100" cap="flat" cmpd="sng" algn="ctr">
+          <a:solidFill>
+            <a:schemeClr val="phClr"/>
+          </a:solidFill>
+          <a:prstDash val="solid"/>
+        </a:ln>
+      </a:lnStyleLst>
+      <a:effectStyleLst>
+        <a:effectStyle>
+          <a:effectLst>
+            <a:outerShdw blurRad="40000" dist="20000" dir="5400000" rotWithShape="0">
+              <a:srgbClr val="000000">
+                <a:alpha val="38000"/>
+              </a:srgbClr>
+            </a:outerShdw>
+          </a:effectLst>
+        </a:effectStyle>
+        <a:effectStyle>
+          <a:effectLst>
+            <a:outerShdw blurRad="40000" dist="23000" dir="5400000" rotWithShape="0">
+              <a:srgbClr val="000000">
+                <a:alpha val="35000"/>
+              </a:srgbClr>
+            </a:outerShdw>
+          </a:effectLst>
+        </a:effectStyle>
+        <a:effectStyle>
+          <a:effectLst>
+            <a:outerShdw blurRad="40000" dist="23000" dir="5400000" rotWithShape="0">
+              <a:srgbClr val="000000">
+                <a:alpha val="35000"/>
+              </a:srgbClr>
+            </a:outerShdw>
+          </a:effectLst>
+          <a:scene3d>
+            <a:camera prst="orthographicFront">
+              <a:rot lat="0" lon="0" rev="0"/>
+            </a:camera>
+            <a:lightRig rig="threePt" dir="t">
+              <a:rot lat="0" lon="0" rev="1200000"/>
+            </a:lightRig>
+          </a:scene3d>
+          <a:sp3d>
+            <a:bevelT w="63500" h="25400"/>
+          </a:sp3d>
+        </a:effectStyle>
+      </a:effectStyleLst>
+      <a:bgFillStyleLst>
+        <a:solidFill>
+          <a:schemeClr val="phClr"/>
+        </a:solidFill>
+        <a:gradFill rotWithShape="1">
+          <a:gsLst>
+            <a:gs pos="0">
+              <a:schemeClr val="phClr">
+                <a:tint val="40000"/>
+                <a:satMod val="350000"/>
+              </a:schemeClr>
+            </a:gs>
+            <a:gs pos="40000">
+              <a:schemeClr val="phClr">
+                <a:tint val="45000"/>
+                <a:shade val="99000"/>
+                <a:satMod val="350000"/>
+              </a:schemeClr>
+            </a:gs>
+            <a:gs pos="100000">
+              <a:schemeClr val="phClr">
+                <a:shade val="20000"/>
+                <a:satMod val="255000"/>
+              </a:schemeClr>
+            </a:gs>
+          </a:gsLst>
+          <a:path path="circle">
+            <a:fillToRect l="50000" t="-80000" r="50000" b="180000"/>
+          </a:path>
+        </a:gradFill>
+        <a:gradFill rotWithShape="1">
+          <a:gsLst>
+            <a:gs pos="0">
+              <a:schemeClr val="phClr">
+                <a:tint val="80000"/>
+                <a:satMod val="300000"/>
+              </a:schemeClr>
+            </a:gs>
+            <a:gs pos="100000">
+              <a:schemeClr val="phClr">
+                <a:shade val="30000"/>
+                <a:satMod val="200000"/>
+              </a:schemeClr>
+            </a:gs>
+          </a:gsLst>
+          <a:path path="circle">
+            <a:fillToRect l="50000" t="50000" r="50000" b="50000"/>
+          </a:path>
+        </a:gradFill>
+      </a:bgFillStyleLst>
+    </a:fmtScheme>
+  </a:themeElements>
+  <a:objectDefaults>
+    <a:spDef>
+      <a:spPr/>
+      <a:bodyPr/>
+      <a:lstStyle/>
+      <a:style>
+        <a:lnRef idx="1">
+          <a:schemeClr val="accent1"/>
+        </a:lnRef>
+        <a:fillRef idx="3">
+          <a:schemeClr val="accent1"/>
+        </a:fillRef>
+        <a:effectRef idx="2">
+          <a:schemeClr val="accent1"/>
+        </a:effectRef>
+        <a:fontRef idx="minor">
+          <a:schemeClr val="lt1"/>
+        </a:fontRef>
+      </a:style>
+    </a:spDef>
+    <a:lnDef>
+      <a:spPr/>
+      <a:bodyPr/>
+      <a:lstStyle/>
+      <a:style>
+        <a:lnRef idx="2">
+          <a:schemeClr val="accent1"/>
+        </a:lnRef>
+        <a:fillRef idx="0">
+          <a:schemeClr val="accent1"/>
+        </a:fillRef>
+        <a:effectRef idx="1">
+          <a:schemeClr val="accent1"/>
+        </a:effectRef>
+        <a:fontRef idx="minor">
+          <a:schemeClr val="tx1"/>
+        </a:fontRef>
+      </a:style>
+    </a:lnDef>
+  </a:objectDefaults>
+  <a:extraClrSchemeLst/>
+</a:theme>
 </file>